--- a/doc/Презентация WEB.pptx
+++ b/doc/Презентация WEB.pptx
@@ -3,13 +3,14 @@
 <p:presentation xmlns:a="http://schemas.openxmlformats.org/drawingml/2006/main" xmlns:p="http://schemas.openxmlformats.org/presentationml/2006/main" xmlns:r="http://schemas.openxmlformats.org/officeDocument/2006/relationships" xmlns:p14="http://schemas.microsoft.com/office/powerpoint/2010/main" xmlns:p15="http://schemas.microsoft.com/office/powerpoint/2012/main" xmlns:mc="http://schemas.openxmlformats.org/markup-compatibility/2006">
   <p:sldMasterIdLst>
     <p:sldMasterId id="2147483648" r:id="rId2"/>
+    <p:sldMasterId id="2147483661" r:id="rId3"/>
   </p:sldMasterIdLst>
   <p:sldIdLst>
-    <p:sldId id="256" r:id="rId3"/>
-    <p:sldId id="257" r:id="rId4"/>
-    <p:sldId id="258" r:id="rId5"/>
-    <p:sldId id="259" r:id="rId6"/>
-    <p:sldId id="260" r:id="rId7"/>
+    <p:sldId id="256" r:id="rId4"/>
+    <p:sldId id="257" r:id="rId5"/>
+    <p:sldId id="258" r:id="rId6"/>
+    <p:sldId id="259" r:id="rId7"/>
+    <p:sldId id="260" r:id="rId8"/>
   </p:sldIdLst>
   <p:sldSz cx="10080625" cy="5670550"/>
   <p:notesSz cx="7559675" cy="10691813"/>
@@ -40,7 +41,7 @@
             <a:spLocks noGrp="1"/>
           </p:cNvSpPr>
           <p:nvPr>
-            <p:ph type="ftr" idx="2"/>
+            <p:ph type="ftr" idx="1"/>
           </p:nvPr>
         </p:nvSpPr>
         <p:spPr/>
@@ -60,14 +61,14 @@
             <a:spLocks noGrp="1"/>
           </p:cNvSpPr>
           <p:nvPr>
-            <p:ph type="sldNum" idx="3"/>
+            <p:ph type="sldNum" idx="2"/>
           </p:nvPr>
         </p:nvSpPr>
         <p:spPr/>
         <p:txBody>
           <a:bodyPr/>
           <a:p>
-            <a:fld id="{E7BA3FAE-5C59-4245-AF4F-E7913E879F1D}" type="slidenum">
+            <a:fld id="{30881EA7-F4B6-4B3B-B813-66502570EC61}" type="slidenum">
               <a:t>&lt;#&gt;</a:t>
             </a:fld>
           </a:p>
@@ -80,7 +81,7 @@
             <a:spLocks noGrp="1"/>
           </p:cNvSpPr>
           <p:nvPr>
-            <p:ph type="dt" idx="1"/>
+            <p:ph type="dt" idx="3"/>
           </p:nvPr>
         </p:nvSpPr>
         <p:spPr/>
@@ -129,7 +130,7 @@
         <p:spPr>
           <a:xfrm>
             <a:off x="504000" y="74160"/>
-            <a:ext cx="9071640" cy="1250280"/>
+            <a:ext cx="9071280" cy="1250280"/>
           </a:xfrm>
           <a:prstGeom prst="rect">
             <a:avLst/>
@@ -169,7 +170,7 @@
         <p:spPr>
           <a:xfrm>
             <a:off x="504000" y="1326600"/>
-            <a:ext cx="9071640" cy="1568160"/>
+            <a:ext cx="9071280" cy="1568160"/>
           </a:xfrm>
           <a:prstGeom prst="rect">
             <a:avLst/>
@@ -212,7 +213,7 @@
         <p:spPr>
           <a:xfrm>
             <a:off x="504000" y="3044160"/>
-            <a:ext cx="9071640" cy="1568160"/>
+            <a:ext cx="9071280" cy="1568160"/>
           </a:xfrm>
           <a:prstGeom prst="rect">
             <a:avLst/>
@@ -249,7 +250,7 @@
             <a:spLocks noGrp="1"/>
           </p:cNvSpPr>
           <p:nvPr>
-            <p:ph type="ftr" idx="2"/>
+            <p:ph type="ftr" idx="1"/>
           </p:nvPr>
         </p:nvSpPr>
         <p:spPr/>
@@ -269,14 +270,14 @@
             <a:spLocks noGrp="1"/>
           </p:cNvSpPr>
           <p:nvPr>
-            <p:ph type="sldNum" idx="3"/>
+            <p:ph type="sldNum" idx="2"/>
           </p:nvPr>
         </p:nvSpPr>
         <p:spPr/>
         <p:txBody>
           <a:bodyPr/>
           <a:p>
-            <a:fld id="{C85C7190-9E76-43EB-8DFB-6C11E454BA4C}" type="slidenum">
+            <a:fld id="{4FE5BC79-66D0-4E76-BD02-9B2834AF6DBA}" type="slidenum">
               <a:t>&lt;#&gt;</a:t>
             </a:fld>
           </a:p>
@@ -289,7 +290,7 @@
             <a:spLocks noGrp="1"/>
           </p:cNvSpPr>
           <p:nvPr>
-            <p:ph type="dt" idx="1"/>
+            <p:ph type="dt" idx="3"/>
           </p:nvPr>
         </p:nvSpPr>
         <p:spPr/>
@@ -338,7 +339,7 @@
         <p:spPr>
           <a:xfrm>
             <a:off x="504000" y="74160"/>
-            <a:ext cx="9071640" cy="1250280"/>
+            <a:ext cx="9071280" cy="1250280"/>
           </a:xfrm>
           <a:prstGeom prst="rect">
             <a:avLst/>
@@ -378,7 +379,7 @@
         <p:spPr>
           <a:xfrm>
             <a:off x="504000" y="1326600"/>
-            <a:ext cx="4426920" cy="1568160"/>
+            <a:ext cx="4426560" cy="1568160"/>
           </a:xfrm>
           <a:prstGeom prst="rect">
             <a:avLst/>
@@ -420,8 +421,8 @@
         </p:nvSpPr>
         <p:spPr>
           <a:xfrm>
-            <a:off x="5152680" y="1326600"/>
-            <a:ext cx="4426920" cy="1568160"/>
+            <a:off x="5152320" y="1326600"/>
+            <a:ext cx="4426560" cy="1568160"/>
           </a:xfrm>
           <a:prstGeom prst="rect">
             <a:avLst/>
@@ -464,7 +465,7 @@
         <p:spPr>
           <a:xfrm>
             <a:off x="504000" y="3044160"/>
-            <a:ext cx="4426920" cy="1568160"/>
+            <a:ext cx="4426560" cy="1568160"/>
           </a:xfrm>
           <a:prstGeom prst="rect">
             <a:avLst/>
@@ -506,8 +507,8 @@
         </p:nvSpPr>
         <p:spPr>
           <a:xfrm>
-            <a:off x="5152680" y="3044160"/>
-            <a:ext cx="4426920" cy="1568160"/>
+            <a:off x="5152320" y="3044160"/>
+            <a:ext cx="4426560" cy="1568160"/>
           </a:xfrm>
           <a:prstGeom prst="rect">
             <a:avLst/>
@@ -544,7 +545,7 @@
             <a:spLocks noGrp="1"/>
           </p:cNvSpPr>
           <p:nvPr>
-            <p:ph type="ftr" idx="2"/>
+            <p:ph type="ftr" idx="1"/>
           </p:nvPr>
         </p:nvSpPr>
         <p:spPr/>
@@ -564,14 +565,14 @@
             <a:spLocks noGrp="1"/>
           </p:cNvSpPr>
           <p:nvPr>
-            <p:ph type="sldNum" idx="3"/>
+            <p:ph type="sldNum" idx="2"/>
           </p:nvPr>
         </p:nvSpPr>
         <p:spPr/>
         <p:txBody>
           <a:bodyPr/>
           <a:p>
-            <a:fld id="{403F029C-AA66-4F9E-BB5A-E4209B10D631}" type="slidenum">
+            <a:fld id="{080D7E72-4059-4607-ACE1-F154587F9056}" type="slidenum">
               <a:t>&lt;#&gt;</a:t>
             </a:fld>
           </a:p>
@@ -584,7 +585,7 @@
             <a:spLocks noGrp="1"/>
           </p:cNvSpPr>
           <p:nvPr>
-            <p:ph type="dt" idx="1"/>
+            <p:ph type="dt" idx="3"/>
           </p:nvPr>
         </p:nvSpPr>
         <p:spPr/>
@@ -633,7 +634,7 @@
         <p:spPr>
           <a:xfrm>
             <a:off x="504000" y="74160"/>
-            <a:ext cx="9071640" cy="1250280"/>
+            <a:ext cx="9071280" cy="1250280"/>
           </a:xfrm>
           <a:prstGeom prst="rect">
             <a:avLst/>
@@ -925,7 +926,7 @@
             <a:spLocks noGrp="1"/>
           </p:cNvSpPr>
           <p:nvPr>
-            <p:ph type="ftr" idx="2"/>
+            <p:ph type="ftr" idx="1"/>
           </p:nvPr>
         </p:nvSpPr>
         <p:spPr/>
@@ -945,14 +946,14 @@
             <a:spLocks noGrp="1"/>
           </p:cNvSpPr>
           <p:nvPr>
-            <p:ph type="sldNum" idx="3"/>
+            <p:ph type="sldNum" idx="2"/>
           </p:nvPr>
         </p:nvSpPr>
         <p:spPr/>
         <p:txBody>
           <a:bodyPr/>
           <a:p>
-            <a:fld id="{19DC3084-BA44-400D-A9FE-8C31B4E314F7}" type="slidenum">
+            <a:fld id="{1DB8B6D3-8477-484E-AEB4-53969CCA0F5E}" type="slidenum">
               <a:t>&lt;#&gt;</a:t>
             </a:fld>
           </a:p>
@@ -965,7 +966,1124 @@
             <a:spLocks noGrp="1"/>
           </p:cNvSpPr>
           <p:nvPr>
-            <p:ph type="dt" idx="1"/>
+            <p:ph type="dt" idx="3"/>
+          </p:nvPr>
+        </p:nvSpPr>
+        <p:spPr/>
+        <p:txBody>
+          <a:bodyPr/>
+          <a:p>
+            <a:r>
+              <a:rPr lang="ru-RU"/>
+              <a:t/>
+            </a:r>
+          </a:p>
+        </p:txBody>
+      </p:sp>
+    </p:spTree>
+  </p:cSld>
+</p:sldLayout>
+</file>
+
+<file path=ppt/slideLayouts/slideLayout13.xml><?xml version="1.0" encoding="utf-8"?>
+<p:sldLayout xmlns:a="http://schemas.openxmlformats.org/drawingml/2006/main" xmlns:p="http://schemas.openxmlformats.org/presentationml/2006/main" xmlns:r="http://schemas.openxmlformats.org/officeDocument/2006/relationships" xmlns:p14="http://schemas.microsoft.com/office/powerpoint/2010/main" xmlns:p15="http://schemas.microsoft.com/office/powerpoint/2012/main" xmlns:mc="http://schemas.openxmlformats.org/markup-compatibility/2006" type="blank" preserve="1">
+  <p:cSld name="Blank Slide">
+    <p:spTree>
+      <p:nvGrpSpPr>
+        <p:cNvPr id="1" name=""/>
+        <p:cNvGrpSpPr/>
+        <p:nvPr/>
+      </p:nvGrpSpPr>
+      <p:grpSpPr>
+        <a:xfrm>
+          <a:off x="0" y="0"/>
+          <a:ext cx="0" cy="0"/>
+          <a:chOff x="0" y="0"/>
+          <a:chExt cx="0" cy="0"/>
+        </a:xfrm>
+      </p:grpSpPr>
+      <p:sp>
+        <p:nvSpPr>
+          <p:cNvPr id="2" name="PlaceHolder 1"/>
+          <p:cNvSpPr>
+            <a:spLocks noGrp="1"/>
+          </p:cNvSpPr>
+          <p:nvPr>
+            <p:ph type="ftr" idx="4"/>
+          </p:nvPr>
+        </p:nvSpPr>
+        <p:spPr/>
+        <p:txBody>
+          <a:bodyPr/>
+          <a:p>
+            <a:r>
+              <a:t>Footer</a:t>
+            </a:r>
+          </a:p>
+        </p:txBody>
+      </p:sp>
+      <p:sp>
+        <p:nvSpPr>
+          <p:cNvPr id="3" name="PlaceHolder 2"/>
+          <p:cNvSpPr>
+            <a:spLocks noGrp="1"/>
+          </p:cNvSpPr>
+          <p:nvPr>
+            <p:ph type="sldNum" idx="5"/>
+          </p:nvPr>
+        </p:nvSpPr>
+        <p:spPr/>
+        <p:txBody>
+          <a:bodyPr/>
+          <a:p>
+            <a:fld id="{537BE853-BB40-4126-BE84-D42D69D06774}" type="slidenum">
+              <a:t>&lt;#&gt;</a:t>
+            </a:fld>
+          </a:p>
+        </p:txBody>
+      </p:sp>
+      <p:sp>
+        <p:nvSpPr>
+          <p:cNvPr id="4" name="PlaceHolder 3"/>
+          <p:cNvSpPr>
+            <a:spLocks noGrp="1"/>
+          </p:cNvSpPr>
+          <p:nvPr>
+            <p:ph type="dt" idx="6"/>
+          </p:nvPr>
+        </p:nvSpPr>
+        <p:spPr/>
+        <p:txBody>
+          <a:bodyPr/>
+          <a:p>
+            <a:r>
+              <a:rPr lang="ru-RU"/>
+              <a:t/>
+            </a:r>
+          </a:p>
+        </p:txBody>
+      </p:sp>
+    </p:spTree>
+  </p:cSld>
+</p:sldLayout>
+</file>
+
+<file path=ppt/slideLayouts/slideLayout14.xml><?xml version="1.0" encoding="utf-8"?>
+<p:sldLayout xmlns:a="http://schemas.openxmlformats.org/drawingml/2006/main" xmlns:p="http://schemas.openxmlformats.org/presentationml/2006/main" xmlns:r="http://schemas.openxmlformats.org/officeDocument/2006/relationships" xmlns:p14="http://schemas.microsoft.com/office/powerpoint/2010/main" xmlns:p15="http://schemas.microsoft.com/office/powerpoint/2012/main" xmlns:mc="http://schemas.openxmlformats.org/markup-compatibility/2006" type="tx" preserve="1">
+  <p:cSld name="Title Slide">
+    <p:spTree>
+      <p:nvGrpSpPr>
+        <p:cNvPr id="1" name=""/>
+        <p:cNvGrpSpPr/>
+        <p:nvPr/>
+      </p:nvGrpSpPr>
+      <p:grpSpPr>
+        <a:xfrm>
+          <a:off x="0" y="0"/>
+          <a:ext cx="0" cy="0"/>
+          <a:chOff x="0" y="0"/>
+          <a:chExt cx="0" cy="0"/>
+        </a:xfrm>
+      </p:grpSpPr>
+      <p:sp>
+        <p:nvSpPr>
+          <p:cNvPr id="46" name="PlaceHolder 1"/>
+          <p:cNvSpPr>
+            <a:spLocks noGrp="1"/>
+          </p:cNvSpPr>
+          <p:nvPr>
+            <p:ph type="title"/>
+          </p:nvPr>
+        </p:nvSpPr>
+        <p:spPr>
+          <a:xfrm>
+            <a:off x="504000" y="74160"/>
+            <a:ext cx="9071280" cy="1250280"/>
+          </a:xfrm>
+          <a:prstGeom prst="rect">
+            <a:avLst/>
+          </a:prstGeom>
+          <a:noFill/>
+          <a:ln w="0">
+            <a:noFill/>
+          </a:ln>
+        </p:spPr>
+        <p:txBody>
+          <a:bodyPr lIns="0" rIns="0" tIns="0" bIns="0" anchor="ctr">
+            <a:noAutofit/>
+          </a:bodyPr>
+          <a:p>
+            <a:pPr indent="0" algn="ctr">
+              <a:buNone/>
+            </a:pPr>
+            <a:endParaRPr b="0" lang="ru-RU" sz="4400" spc="-1" strike="noStrike">
+              <a:solidFill>
+                <a:srgbClr val="000000"/>
+              </a:solidFill>
+              <a:latin typeface="Arial"/>
+            </a:endParaRPr>
+          </a:p>
+        </p:txBody>
+      </p:sp>
+      <p:sp>
+        <p:nvSpPr>
+          <p:cNvPr id="47" name="PlaceHolder 2"/>
+          <p:cNvSpPr>
+            <a:spLocks noGrp="1"/>
+          </p:cNvSpPr>
+          <p:nvPr>
+            <p:ph type="subTitle"/>
+          </p:nvPr>
+        </p:nvSpPr>
+        <p:spPr>
+          <a:xfrm>
+            <a:off x="504000" y="1326600"/>
+            <a:ext cx="9071280" cy="3287880"/>
+          </a:xfrm>
+          <a:prstGeom prst="rect">
+            <a:avLst/>
+          </a:prstGeom>
+          <a:noFill/>
+          <a:ln w="0">
+            <a:noFill/>
+          </a:ln>
+        </p:spPr>
+        <p:txBody>
+          <a:bodyPr lIns="0" rIns="0" tIns="0" bIns="0" anchor="ctr">
+            <a:noAutofit/>
+          </a:bodyPr>
+          <a:p>
+            <a:pPr indent="0" algn="ctr">
+              <a:buNone/>
+            </a:pPr>
+            <a:endParaRPr b="0" lang="ru-RU" sz="3200" spc="-1" strike="noStrike">
+              <a:solidFill>
+                <a:srgbClr val="000000"/>
+              </a:solidFill>
+              <a:latin typeface="Arial"/>
+            </a:endParaRPr>
+          </a:p>
+        </p:txBody>
+      </p:sp>
+      <p:sp>
+        <p:nvSpPr>
+          <p:cNvPr id="4" name="PlaceHolder 3"/>
+          <p:cNvSpPr>
+            <a:spLocks noGrp="1"/>
+          </p:cNvSpPr>
+          <p:nvPr>
+            <p:ph type="ftr" idx="4"/>
+          </p:nvPr>
+        </p:nvSpPr>
+        <p:spPr/>
+        <p:txBody>
+          <a:bodyPr/>
+          <a:p>
+            <a:r>
+              <a:t>Footer</a:t>
+            </a:r>
+          </a:p>
+        </p:txBody>
+      </p:sp>
+      <p:sp>
+        <p:nvSpPr>
+          <p:cNvPr id="5" name="PlaceHolder 4"/>
+          <p:cNvSpPr>
+            <a:spLocks noGrp="1"/>
+          </p:cNvSpPr>
+          <p:nvPr>
+            <p:ph type="sldNum" idx="5"/>
+          </p:nvPr>
+        </p:nvSpPr>
+        <p:spPr/>
+        <p:txBody>
+          <a:bodyPr/>
+          <a:p>
+            <a:fld id="{1222F003-BF7B-4E27-99EF-B1515E207275}" type="slidenum">
+              <a:t>&lt;#&gt;</a:t>
+            </a:fld>
+          </a:p>
+        </p:txBody>
+      </p:sp>
+      <p:sp>
+        <p:nvSpPr>
+          <p:cNvPr id="6" name="PlaceHolder 5"/>
+          <p:cNvSpPr>
+            <a:spLocks noGrp="1"/>
+          </p:cNvSpPr>
+          <p:nvPr>
+            <p:ph type="dt" idx="6"/>
+          </p:nvPr>
+        </p:nvSpPr>
+        <p:spPr/>
+        <p:txBody>
+          <a:bodyPr/>
+          <a:p>
+            <a:r>
+              <a:rPr lang="ru-RU"/>
+              <a:t/>
+            </a:r>
+          </a:p>
+        </p:txBody>
+      </p:sp>
+    </p:spTree>
+  </p:cSld>
+</p:sldLayout>
+</file>
+
+<file path=ppt/slideLayouts/slideLayout15.xml><?xml version="1.0" encoding="utf-8"?>
+<p:sldLayout xmlns:a="http://schemas.openxmlformats.org/drawingml/2006/main" xmlns:p="http://schemas.openxmlformats.org/presentationml/2006/main" xmlns:r="http://schemas.openxmlformats.org/officeDocument/2006/relationships" xmlns:p14="http://schemas.microsoft.com/office/powerpoint/2010/main" xmlns:p15="http://schemas.microsoft.com/office/powerpoint/2012/main" xmlns:mc="http://schemas.openxmlformats.org/markup-compatibility/2006" type="obj" preserve="1">
+  <p:cSld name="Title, Content">
+    <p:spTree>
+      <p:nvGrpSpPr>
+        <p:cNvPr id="1" name=""/>
+        <p:cNvGrpSpPr/>
+        <p:nvPr/>
+      </p:nvGrpSpPr>
+      <p:grpSpPr>
+        <a:xfrm>
+          <a:off x="0" y="0"/>
+          <a:ext cx="0" cy="0"/>
+          <a:chOff x="0" y="0"/>
+          <a:chExt cx="0" cy="0"/>
+        </a:xfrm>
+      </p:grpSpPr>
+      <p:sp>
+        <p:nvSpPr>
+          <p:cNvPr id="48" name="PlaceHolder 1"/>
+          <p:cNvSpPr>
+            <a:spLocks noGrp="1"/>
+          </p:cNvSpPr>
+          <p:nvPr>
+            <p:ph type="title"/>
+          </p:nvPr>
+        </p:nvSpPr>
+        <p:spPr>
+          <a:xfrm>
+            <a:off x="504000" y="74160"/>
+            <a:ext cx="9071280" cy="1250280"/>
+          </a:xfrm>
+          <a:prstGeom prst="rect">
+            <a:avLst/>
+          </a:prstGeom>
+          <a:noFill/>
+          <a:ln w="0">
+            <a:noFill/>
+          </a:ln>
+        </p:spPr>
+        <p:txBody>
+          <a:bodyPr lIns="0" rIns="0" tIns="0" bIns="0" anchor="ctr">
+            <a:noAutofit/>
+          </a:bodyPr>
+          <a:p>
+            <a:pPr indent="0" algn="ctr">
+              <a:buNone/>
+            </a:pPr>
+            <a:endParaRPr b="0" lang="ru-RU" sz="4400" spc="-1" strike="noStrike">
+              <a:solidFill>
+                <a:srgbClr val="000000"/>
+              </a:solidFill>
+              <a:latin typeface="Arial"/>
+            </a:endParaRPr>
+          </a:p>
+        </p:txBody>
+      </p:sp>
+      <p:sp>
+        <p:nvSpPr>
+          <p:cNvPr id="49" name="PlaceHolder 2"/>
+          <p:cNvSpPr>
+            <a:spLocks noGrp="1"/>
+          </p:cNvSpPr>
+          <p:nvPr>
+            <p:ph/>
+          </p:nvPr>
+        </p:nvSpPr>
+        <p:spPr>
+          <a:xfrm>
+            <a:off x="504000" y="1326600"/>
+            <a:ext cx="9071280" cy="3287880"/>
+          </a:xfrm>
+          <a:prstGeom prst="rect">
+            <a:avLst/>
+          </a:prstGeom>
+          <a:noFill/>
+          <a:ln w="0">
+            <a:noFill/>
+          </a:ln>
+        </p:spPr>
+        <p:txBody>
+          <a:bodyPr lIns="0" rIns="0" tIns="0" bIns="0" anchor="t">
+            <a:normAutofit/>
+          </a:bodyPr>
+          <a:p>
+            <a:pPr indent="0">
+              <a:spcBef>
+                <a:spcPts val="1417"/>
+              </a:spcBef>
+              <a:buNone/>
+            </a:pPr>
+            <a:endParaRPr b="0" lang="ru-RU" sz="3200" spc="-1" strike="noStrike">
+              <a:solidFill>
+                <a:srgbClr val="000000"/>
+              </a:solidFill>
+              <a:latin typeface="Arial"/>
+            </a:endParaRPr>
+          </a:p>
+        </p:txBody>
+      </p:sp>
+      <p:sp>
+        <p:nvSpPr>
+          <p:cNvPr id="4" name="PlaceHolder 3"/>
+          <p:cNvSpPr>
+            <a:spLocks noGrp="1"/>
+          </p:cNvSpPr>
+          <p:nvPr>
+            <p:ph type="ftr" idx="4"/>
+          </p:nvPr>
+        </p:nvSpPr>
+        <p:spPr/>
+        <p:txBody>
+          <a:bodyPr/>
+          <a:p>
+            <a:r>
+              <a:t>Footer</a:t>
+            </a:r>
+          </a:p>
+        </p:txBody>
+      </p:sp>
+      <p:sp>
+        <p:nvSpPr>
+          <p:cNvPr id="5" name="PlaceHolder 4"/>
+          <p:cNvSpPr>
+            <a:spLocks noGrp="1"/>
+          </p:cNvSpPr>
+          <p:nvPr>
+            <p:ph type="sldNum" idx="5"/>
+          </p:nvPr>
+        </p:nvSpPr>
+        <p:spPr/>
+        <p:txBody>
+          <a:bodyPr/>
+          <a:p>
+            <a:fld id="{E1C0606C-BAD7-4F93-A951-281F4F8EEF34}" type="slidenum">
+              <a:t>&lt;#&gt;</a:t>
+            </a:fld>
+          </a:p>
+        </p:txBody>
+      </p:sp>
+      <p:sp>
+        <p:nvSpPr>
+          <p:cNvPr id="6" name="PlaceHolder 5"/>
+          <p:cNvSpPr>
+            <a:spLocks noGrp="1"/>
+          </p:cNvSpPr>
+          <p:nvPr>
+            <p:ph type="dt" idx="6"/>
+          </p:nvPr>
+        </p:nvSpPr>
+        <p:spPr/>
+        <p:txBody>
+          <a:bodyPr/>
+          <a:p>
+            <a:r>
+              <a:rPr lang="ru-RU"/>
+              <a:t/>
+            </a:r>
+          </a:p>
+        </p:txBody>
+      </p:sp>
+    </p:spTree>
+  </p:cSld>
+</p:sldLayout>
+</file>
+
+<file path=ppt/slideLayouts/slideLayout16.xml><?xml version="1.0" encoding="utf-8"?>
+<p:sldLayout xmlns:a="http://schemas.openxmlformats.org/drawingml/2006/main" xmlns:p="http://schemas.openxmlformats.org/presentationml/2006/main" xmlns:r="http://schemas.openxmlformats.org/officeDocument/2006/relationships" xmlns:p14="http://schemas.microsoft.com/office/powerpoint/2010/main" xmlns:p15="http://schemas.microsoft.com/office/powerpoint/2012/main" xmlns:mc="http://schemas.openxmlformats.org/markup-compatibility/2006" type="twoObj" preserve="1">
+  <p:cSld name="Title, 2 Content">
+    <p:spTree>
+      <p:nvGrpSpPr>
+        <p:cNvPr id="1" name=""/>
+        <p:cNvGrpSpPr/>
+        <p:nvPr/>
+      </p:nvGrpSpPr>
+      <p:grpSpPr>
+        <a:xfrm>
+          <a:off x="0" y="0"/>
+          <a:ext cx="0" cy="0"/>
+          <a:chOff x="0" y="0"/>
+          <a:chExt cx="0" cy="0"/>
+        </a:xfrm>
+      </p:grpSpPr>
+      <p:sp>
+        <p:nvSpPr>
+          <p:cNvPr id="50" name="PlaceHolder 1"/>
+          <p:cNvSpPr>
+            <a:spLocks noGrp="1"/>
+          </p:cNvSpPr>
+          <p:nvPr>
+            <p:ph type="title"/>
+          </p:nvPr>
+        </p:nvSpPr>
+        <p:spPr>
+          <a:xfrm>
+            <a:off x="504000" y="74160"/>
+            <a:ext cx="9071280" cy="1250280"/>
+          </a:xfrm>
+          <a:prstGeom prst="rect">
+            <a:avLst/>
+          </a:prstGeom>
+          <a:noFill/>
+          <a:ln w="0">
+            <a:noFill/>
+          </a:ln>
+        </p:spPr>
+        <p:txBody>
+          <a:bodyPr lIns="0" rIns="0" tIns="0" bIns="0" anchor="ctr">
+            <a:noAutofit/>
+          </a:bodyPr>
+          <a:p>
+            <a:pPr indent="0" algn="ctr">
+              <a:buNone/>
+            </a:pPr>
+            <a:endParaRPr b="0" lang="ru-RU" sz="4400" spc="-1" strike="noStrike">
+              <a:solidFill>
+                <a:srgbClr val="000000"/>
+              </a:solidFill>
+              <a:latin typeface="Arial"/>
+            </a:endParaRPr>
+          </a:p>
+        </p:txBody>
+      </p:sp>
+      <p:sp>
+        <p:nvSpPr>
+          <p:cNvPr id="51" name="PlaceHolder 2"/>
+          <p:cNvSpPr>
+            <a:spLocks noGrp="1"/>
+          </p:cNvSpPr>
+          <p:nvPr>
+            <p:ph/>
+          </p:nvPr>
+        </p:nvSpPr>
+        <p:spPr>
+          <a:xfrm>
+            <a:off x="504000" y="1326600"/>
+            <a:ext cx="4426560" cy="3287880"/>
+          </a:xfrm>
+          <a:prstGeom prst="rect">
+            <a:avLst/>
+          </a:prstGeom>
+          <a:noFill/>
+          <a:ln w="0">
+            <a:noFill/>
+          </a:ln>
+        </p:spPr>
+        <p:txBody>
+          <a:bodyPr lIns="0" rIns="0" tIns="0" bIns="0" anchor="t">
+            <a:normAutofit/>
+          </a:bodyPr>
+          <a:p>
+            <a:pPr indent="0">
+              <a:spcBef>
+                <a:spcPts val="1417"/>
+              </a:spcBef>
+              <a:buNone/>
+            </a:pPr>
+            <a:endParaRPr b="0" lang="ru-RU" sz="3200" spc="-1" strike="noStrike">
+              <a:solidFill>
+                <a:srgbClr val="000000"/>
+              </a:solidFill>
+              <a:latin typeface="Arial"/>
+            </a:endParaRPr>
+          </a:p>
+        </p:txBody>
+      </p:sp>
+      <p:sp>
+        <p:nvSpPr>
+          <p:cNvPr id="52" name="PlaceHolder 3"/>
+          <p:cNvSpPr>
+            <a:spLocks noGrp="1"/>
+          </p:cNvSpPr>
+          <p:nvPr>
+            <p:ph/>
+          </p:nvPr>
+        </p:nvSpPr>
+        <p:spPr>
+          <a:xfrm>
+            <a:off x="5152320" y="1326600"/>
+            <a:ext cx="4426560" cy="3287880"/>
+          </a:xfrm>
+          <a:prstGeom prst="rect">
+            <a:avLst/>
+          </a:prstGeom>
+          <a:noFill/>
+          <a:ln w="0">
+            <a:noFill/>
+          </a:ln>
+        </p:spPr>
+        <p:txBody>
+          <a:bodyPr lIns="0" rIns="0" tIns="0" bIns="0" anchor="t">
+            <a:normAutofit/>
+          </a:bodyPr>
+          <a:p>
+            <a:pPr indent="0">
+              <a:spcBef>
+                <a:spcPts val="1417"/>
+              </a:spcBef>
+              <a:buNone/>
+            </a:pPr>
+            <a:endParaRPr b="0" lang="ru-RU" sz="3200" spc="-1" strike="noStrike">
+              <a:solidFill>
+                <a:srgbClr val="000000"/>
+              </a:solidFill>
+              <a:latin typeface="Arial"/>
+            </a:endParaRPr>
+          </a:p>
+        </p:txBody>
+      </p:sp>
+      <p:sp>
+        <p:nvSpPr>
+          <p:cNvPr id="5" name="PlaceHolder 4"/>
+          <p:cNvSpPr>
+            <a:spLocks noGrp="1"/>
+          </p:cNvSpPr>
+          <p:nvPr>
+            <p:ph type="ftr" idx="4"/>
+          </p:nvPr>
+        </p:nvSpPr>
+        <p:spPr/>
+        <p:txBody>
+          <a:bodyPr/>
+          <a:p>
+            <a:r>
+              <a:t>Footer</a:t>
+            </a:r>
+          </a:p>
+        </p:txBody>
+      </p:sp>
+      <p:sp>
+        <p:nvSpPr>
+          <p:cNvPr id="6" name="PlaceHolder 5"/>
+          <p:cNvSpPr>
+            <a:spLocks noGrp="1"/>
+          </p:cNvSpPr>
+          <p:nvPr>
+            <p:ph type="sldNum" idx="5"/>
+          </p:nvPr>
+        </p:nvSpPr>
+        <p:spPr/>
+        <p:txBody>
+          <a:bodyPr/>
+          <a:p>
+            <a:fld id="{DC871423-34E0-4C1B-BC99-6E3237C99D63}" type="slidenum">
+              <a:t>&lt;#&gt;</a:t>
+            </a:fld>
+          </a:p>
+        </p:txBody>
+      </p:sp>
+      <p:sp>
+        <p:nvSpPr>
+          <p:cNvPr id="7" name="PlaceHolder 6"/>
+          <p:cNvSpPr>
+            <a:spLocks noGrp="1"/>
+          </p:cNvSpPr>
+          <p:nvPr>
+            <p:ph type="dt" idx="6"/>
+          </p:nvPr>
+        </p:nvSpPr>
+        <p:spPr/>
+        <p:txBody>
+          <a:bodyPr/>
+          <a:p>
+            <a:r>
+              <a:rPr lang="ru-RU"/>
+              <a:t/>
+            </a:r>
+          </a:p>
+        </p:txBody>
+      </p:sp>
+    </p:spTree>
+  </p:cSld>
+</p:sldLayout>
+</file>
+
+<file path=ppt/slideLayouts/slideLayout17.xml><?xml version="1.0" encoding="utf-8"?>
+<p:sldLayout xmlns:a="http://schemas.openxmlformats.org/drawingml/2006/main" xmlns:p="http://schemas.openxmlformats.org/presentationml/2006/main" xmlns:r="http://schemas.openxmlformats.org/officeDocument/2006/relationships" xmlns:p14="http://schemas.microsoft.com/office/powerpoint/2010/main" xmlns:p15="http://schemas.microsoft.com/office/powerpoint/2012/main" xmlns:mc="http://schemas.openxmlformats.org/markup-compatibility/2006" type="titleOnly" preserve="1">
+  <p:cSld name="Title Only">
+    <p:spTree>
+      <p:nvGrpSpPr>
+        <p:cNvPr id="1" name=""/>
+        <p:cNvGrpSpPr/>
+        <p:nvPr/>
+      </p:nvGrpSpPr>
+      <p:grpSpPr>
+        <a:xfrm>
+          <a:off x="0" y="0"/>
+          <a:ext cx="0" cy="0"/>
+          <a:chOff x="0" y="0"/>
+          <a:chExt cx="0" cy="0"/>
+        </a:xfrm>
+      </p:grpSpPr>
+      <p:sp>
+        <p:nvSpPr>
+          <p:cNvPr id="53" name="PlaceHolder 1"/>
+          <p:cNvSpPr>
+            <a:spLocks noGrp="1"/>
+          </p:cNvSpPr>
+          <p:nvPr>
+            <p:ph type="title"/>
+          </p:nvPr>
+        </p:nvSpPr>
+        <p:spPr>
+          <a:xfrm>
+            <a:off x="504000" y="74160"/>
+            <a:ext cx="9071280" cy="1250280"/>
+          </a:xfrm>
+          <a:prstGeom prst="rect">
+            <a:avLst/>
+          </a:prstGeom>
+          <a:noFill/>
+          <a:ln w="0">
+            <a:noFill/>
+          </a:ln>
+        </p:spPr>
+        <p:txBody>
+          <a:bodyPr lIns="0" rIns="0" tIns="0" bIns="0" anchor="ctr">
+            <a:noAutofit/>
+          </a:bodyPr>
+          <a:p>
+            <a:pPr indent="0" algn="ctr">
+              <a:buNone/>
+            </a:pPr>
+            <a:endParaRPr b="0" lang="ru-RU" sz="4400" spc="-1" strike="noStrike">
+              <a:solidFill>
+                <a:srgbClr val="000000"/>
+              </a:solidFill>
+              <a:latin typeface="Arial"/>
+            </a:endParaRPr>
+          </a:p>
+        </p:txBody>
+      </p:sp>
+      <p:sp>
+        <p:nvSpPr>
+          <p:cNvPr id="3" name="PlaceHolder 2"/>
+          <p:cNvSpPr>
+            <a:spLocks noGrp="1"/>
+          </p:cNvSpPr>
+          <p:nvPr>
+            <p:ph type="ftr" idx="4"/>
+          </p:nvPr>
+        </p:nvSpPr>
+        <p:spPr/>
+        <p:txBody>
+          <a:bodyPr/>
+          <a:p>
+            <a:r>
+              <a:t>Footer</a:t>
+            </a:r>
+          </a:p>
+        </p:txBody>
+      </p:sp>
+      <p:sp>
+        <p:nvSpPr>
+          <p:cNvPr id="4" name="PlaceHolder 3"/>
+          <p:cNvSpPr>
+            <a:spLocks noGrp="1"/>
+          </p:cNvSpPr>
+          <p:nvPr>
+            <p:ph type="sldNum" idx="5"/>
+          </p:nvPr>
+        </p:nvSpPr>
+        <p:spPr/>
+        <p:txBody>
+          <a:bodyPr/>
+          <a:p>
+            <a:fld id="{6D028095-A90D-43C1-8687-1C72061CD25E}" type="slidenum">
+              <a:t>&lt;#&gt;</a:t>
+            </a:fld>
+          </a:p>
+        </p:txBody>
+      </p:sp>
+      <p:sp>
+        <p:nvSpPr>
+          <p:cNvPr id="5" name="PlaceHolder 4"/>
+          <p:cNvSpPr>
+            <a:spLocks noGrp="1"/>
+          </p:cNvSpPr>
+          <p:nvPr>
+            <p:ph type="dt" idx="6"/>
+          </p:nvPr>
+        </p:nvSpPr>
+        <p:spPr/>
+        <p:txBody>
+          <a:bodyPr/>
+          <a:p>
+            <a:r>
+              <a:rPr lang="ru-RU"/>
+              <a:t/>
+            </a:r>
+          </a:p>
+        </p:txBody>
+      </p:sp>
+    </p:spTree>
+  </p:cSld>
+</p:sldLayout>
+</file>
+
+<file path=ppt/slideLayouts/slideLayout18.xml><?xml version="1.0" encoding="utf-8"?>
+<p:sldLayout xmlns:a="http://schemas.openxmlformats.org/drawingml/2006/main" xmlns:p="http://schemas.openxmlformats.org/presentationml/2006/main" xmlns:r="http://schemas.openxmlformats.org/officeDocument/2006/relationships" xmlns:p14="http://schemas.microsoft.com/office/powerpoint/2010/main" xmlns:p15="http://schemas.microsoft.com/office/powerpoint/2012/main" xmlns:mc="http://schemas.openxmlformats.org/markup-compatibility/2006" type="objOnly" preserve="1">
+  <p:cSld name="Centered Text">
+    <p:spTree>
+      <p:nvGrpSpPr>
+        <p:cNvPr id="1" name=""/>
+        <p:cNvGrpSpPr/>
+        <p:nvPr/>
+      </p:nvGrpSpPr>
+      <p:grpSpPr>
+        <a:xfrm>
+          <a:off x="0" y="0"/>
+          <a:ext cx="0" cy="0"/>
+          <a:chOff x="0" y="0"/>
+          <a:chExt cx="0" cy="0"/>
+        </a:xfrm>
+      </p:grpSpPr>
+      <p:sp>
+        <p:nvSpPr>
+          <p:cNvPr id="54" name="PlaceHolder 1"/>
+          <p:cNvSpPr>
+            <a:spLocks noGrp="1"/>
+          </p:cNvSpPr>
+          <p:nvPr>
+            <p:ph type="subTitle"/>
+          </p:nvPr>
+        </p:nvSpPr>
+        <p:spPr>
+          <a:xfrm>
+            <a:off x="504000" y="74160"/>
+            <a:ext cx="9071280" cy="5795280"/>
+          </a:xfrm>
+          <a:prstGeom prst="rect">
+            <a:avLst/>
+          </a:prstGeom>
+          <a:noFill/>
+          <a:ln w="0">
+            <a:noFill/>
+          </a:ln>
+        </p:spPr>
+        <p:txBody>
+          <a:bodyPr lIns="0" rIns="0" tIns="0" bIns="0" anchor="ctr">
+            <a:noAutofit/>
+          </a:bodyPr>
+          <a:p>
+            <a:pPr algn="ctr"/>
+            <a:endParaRPr b="0" lang="ru-RU" sz="3200" spc="-1" strike="noStrike">
+              <a:solidFill>
+                <a:srgbClr val="000000"/>
+              </a:solidFill>
+              <a:latin typeface="Arial"/>
+            </a:endParaRPr>
+          </a:p>
+        </p:txBody>
+      </p:sp>
+      <p:sp>
+        <p:nvSpPr>
+          <p:cNvPr id="3" name="PlaceHolder 2"/>
+          <p:cNvSpPr>
+            <a:spLocks noGrp="1"/>
+          </p:cNvSpPr>
+          <p:nvPr>
+            <p:ph type="ftr" idx="4"/>
+          </p:nvPr>
+        </p:nvSpPr>
+        <p:spPr/>
+        <p:txBody>
+          <a:bodyPr/>
+          <a:p>
+            <a:r>
+              <a:t>Footer</a:t>
+            </a:r>
+          </a:p>
+        </p:txBody>
+      </p:sp>
+      <p:sp>
+        <p:nvSpPr>
+          <p:cNvPr id="4" name="PlaceHolder 3"/>
+          <p:cNvSpPr>
+            <a:spLocks noGrp="1"/>
+          </p:cNvSpPr>
+          <p:nvPr>
+            <p:ph type="sldNum" idx="5"/>
+          </p:nvPr>
+        </p:nvSpPr>
+        <p:spPr/>
+        <p:txBody>
+          <a:bodyPr/>
+          <a:p>
+            <a:fld id="{655C6F2C-09DB-40DE-BF9F-F8C5AE6FF95B}" type="slidenum">
+              <a:t>&lt;#&gt;</a:t>
+            </a:fld>
+          </a:p>
+        </p:txBody>
+      </p:sp>
+      <p:sp>
+        <p:nvSpPr>
+          <p:cNvPr id="5" name="PlaceHolder 4"/>
+          <p:cNvSpPr>
+            <a:spLocks noGrp="1"/>
+          </p:cNvSpPr>
+          <p:nvPr>
+            <p:ph type="dt" idx="6"/>
+          </p:nvPr>
+        </p:nvSpPr>
+        <p:spPr/>
+        <p:txBody>
+          <a:bodyPr/>
+          <a:p>
+            <a:r>
+              <a:rPr lang="ru-RU"/>
+              <a:t/>
+            </a:r>
+          </a:p>
+        </p:txBody>
+      </p:sp>
+    </p:spTree>
+  </p:cSld>
+</p:sldLayout>
+</file>
+
+<file path=ppt/slideLayouts/slideLayout19.xml><?xml version="1.0" encoding="utf-8"?>
+<p:sldLayout xmlns:a="http://schemas.openxmlformats.org/drawingml/2006/main" xmlns:p="http://schemas.openxmlformats.org/presentationml/2006/main" xmlns:r="http://schemas.openxmlformats.org/officeDocument/2006/relationships" xmlns:p14="http://schemas.microsoft.com/office/powerpoint/2010/main" xmlns:p15="http://schemas.microsoft.com/office/powerpoint/2012/main" xmlns:mc="http://schemas.openxmlformats.org/markup-compatibility/2006" type="twoObjAndObj" preserve="1">
+  <p:cSld name="Title, 2 Content and Content">
+    <p:spTree>
+      <p:nvGrpSpPr>
+        <p:cNvPr id="1" name=""/>
+        <p:cNvGrpSpPr/>
+        <p:nvPr/>
+      </p:nvGrpSpPr>
+      <p:grpSpPr>
+        <a:xfrm>
+          <a:off x="0" y="0"/>
+          <a:ext cx="0" cy="0"/>
+          <a:chOff x="0" y="0"/>
+          <a:chExt cx="0" cy="0"/>
+        </a:xfrm>
+      </p:grpSpPr>
+      <p:sp>
+        <p:nvSpPr>
+          <p:cNvPr id="55" name="PlaceHolder 1"/>
+          <p:cNvSpPr>
+            <a:spLocks noGrp="1"/>
+          </p:cNvSpPr>
+          <p:nvPr>
+            <p:ph type="title"/>
+          </p:nvPr>
+        </p:nvSpPr>
+        <p:spPr>
+          <a:xfrm>
+            <a:off x="504000" y="74160"/>
+            <a:ext cx="9071280" cy="1250280"/>
+          </a:xfrm>
+          <a:prstGeom prst="rect">
+            <a:avLst/>
+          </a:prstGeom>
+          <a:noFill/>
+          <a:ln w="0">
+            <a:noFill/>
+          </a:ln>
+        </p:spPr>
+        <p:txBody>
+          <a:bodyPr lIns="0" rIns="0" tIns="0" bIns="0" anchor="ctr">
+            <a:noAutofit/>
+          </a:bodyPr>
+          <a:p>
+            <a:pPr indent="0" algn="ctr">
+              <a:buNone/>
+            </a:pPr>
+            <a:endParaRPr b="0" lang="ru-RU" sz="4400" spc="-1" strike="noStrike">
+              <a:solidFill>
+                <a:srgbClr val="000000"/>
+              </a:solidFill>
+              <a:latin typeface="Arial"/>
+            </a:endParaRPr>
+          </a:p>
+        </p:txBody>
+      </p:sp>
+      <p:sp>
+        <p:nvSpPr>
+          <p:cNvPr id="56" name="PlaceHolder 2"/>
+          <p:cNvSpPr>
+            <a:spLocks noGrp="1"/>
+          </p:cNvSpPr>
+          <p:nvPr>
+            <p:ph/>
+          </p:nvPr>
+        </p:nvSpPr>
+        <p:spPr>
+          <a:xfrm>
+            <a:off x="504000" y="1326600"/>
+            <a:ext cx="4426560" cy="1568160"/>
+          </a:xfrm>
+          <a:prstGeom prst="rect">
+            <a:avLst/>
+          </a:prstGeom>
+          <a:noFill/>
+          <a:ln w="0">
+            <a:noFill/>
+          </a:ln>
+        </p:spPr>
+        <p:txBody>
+          <a:bodyPr lIns="0" rIns="0" tIns="0" bIns="0" anchor="t">
+            <a:normAutofit/>
+          </a:bodyPr>
+          <a:p>
+            <a:pPr indent="0">
+              <a:spcBef>
+                <a:spcPts val="1417"/>
+              </a:spcBef>
+              <a:buNone/>
+            </a:pPr>
+            <a:endParaRPr b="0" lang="ru-RU" sz="3200" spc="-1" strike="noStrike">
+              <a:solidFill>
+                <a:srgbClr val="000000"/>
+              </a:solidFill>
+              <a:latin typeface="Arial"/>
+            </a:endParaRPr>
+          </a:p>
+        </p:txBody>
+      </p:sp>
+      <p:sp>
+        <p:nvSpPr>
+          <p:cNvPr id="57" name="PlaceHolder 3"/>
+          <p:cNvSpPr>
+            <a:spLocks noGrp="1"/>
+          </p:cNvSpPr>
+          <p:nvPr>
+            <p:ph/>
+          </p:nvPr>
+        </p:nvSpPr>
+        <p:spPr>
+          <a:xfrm>
+            <a:off x="5152320" y="1326600"/>
+            <a:ext cx="4426560" cy="3287880"/>
+          </a:xfrm>
+          <a:prstGeom prst="rect">
+            <a:avLst/>
+          </a:prstGeom>
+          <a:noFill/>
+          <a:ln w="0">
+            <a:noFill/>
+          </a:ln>
+        </p:spPr>
+        <p:txBody>
+          <a:bodyPr lIns="0" rIns="0" tIns="0" bIns="0" anchor="t">
+            <a:normAutofit/>
+          </a:bodyPr>
+          <a:p>
+            <a:pPr indent="0">
+              <a:spcBef>
+                <a:spcPts val="1417"/>
+              </a:spcBef>
+              <a:buNone/>
+            </a:pPr>
+            <a:endParaRPr b="0" lang="ru-RU" sz="3200" spc="-1" strike="noStrike">
+              <a:solidFill>
+                <a:srgbClr val="000000"/>
+              </a:solidFill>
+              <a:latin typeface="Arial"/>
+            </a:endParaRPr>
+          </a:p>
+        </p:txBody>
+      </p:sp>
+      <p:sp>
+        <p:nvSpPr>
+          <p:cNvPr id="58" name="PlaceHolder 4"/>
+          <p:cNvSpPr>
+            <a:spLocks noGrp="1"/>
+          </p:cNvSpPr>
+          <p:nvPr>
+            <p:ph/>
+          </p:nvPr>
+        </p:nvSpPr>
+        <p:spPr>
+          <a:xfrm>
+            <a:off x="504000" y="3044160"/>
+            <a:ext cx="4426560" cy="1568160"/>
+          </a:xfrm>
+          <a:prstGeom prst="rect">
+            <a:avLst/>
+          </a:prstGeom>
+          <a:noFill/>
+          <a:ln w="0">
+            <a:noFill/>
+          </a:ln>
+        </p:spPr>
+        <p:txBody>
+          <a:bodyPr lIns="0" rIns="0" tIns="0" bIns="0" anchor="t">
+            <a:normAutofit/>
+          </a:bodyPr>
+          <a:p>
+            <a:pPr indent="0">
+              <a:spcBef>
+                <a:spcPts val="1417"/>
+              </a:spcBef>
+              <a:buNone/>
+            </a:pPr>
+            <a:endParaRPr b="0" lang="ru-RU" sz="3200" spc="-1" strike="noStrike">
+              <a:solidFill>
+                <a:srgbClr val="000000"/>
+              </a:solidFill>
+              <a:latin typeface="Arial"/>
+            </a:endParaRPr>
+          </a:p>
+        </p:txBody>
+      </p:sp>
+      <p:sp>
+        <p:nvSpPr>
+          <p:cNvPr id="6" name="PlaceHolder 5"/>
+          <p:cNvSpPr>
+            <a:spLocks noGrp="1"/>
+          </p:cNvSpPr>
+          <p:nvPr>
+            <p:ph type="ftr" idx="4"/>
+          </p:nvPr>
+        </p:nvSpPr>
+        <p:spPr/>
+        <p:txBody>
+          <a:bodyPr/>
+          <a:p>
+            <a:r>
+              <a:t>Footer</a:t>
+            </a:r>
+          </a:p>
+        </p:txBody>
+      </p:sp>
+      <p:sp>
+        <p:nvSpPr>
+          <p:cNvPr id="7" name="PlaceHolder 6"/>
+          <p:cNvSpPr>
+            <a:spLocks noGrp="1"/>
+          </p:cNvSpPr>
+          <p:nvPr>
+            <p:ph type="sldNum" idx="5"/>
+          </p:nvPr>
+        </p:nvSpPr>
+        <p:spPr/>
+        <p:txBody>
+          <a:bodyPr/>
+          <a:p>
+            <a:fld id="{4E6A4216-3553-458C-9956-98C9D3E26865}" type="slidenum">
+              <a:t>&lt;#&gt;</a:t>
+            </a:fld>
+          </a:p>
+        </p:txBody>
+      </p:sp>
+      <p:sp>
+        <p:nvSpPr>
+          <p:cNvPr id="8" name="PlaceHolder 7"/>
+          <p:cNvSpPr>
+            <a:spLocks noGrp="1"/>
+          </p:cNvSpPr>
+          <p:nvPr>
+            <p:ph type="dt" idx="6"/>
           </p:nvPr>
         </p:nvSpPr>
         <p:spPr/>
@@ -1014,7 +2132,7 @@
         <p:spPr>
           <a:xfrm>
             <a:off x="504000" y="74160"/>
-            <a:ext cx="9071640" cy="1250280"/>
+            <a:ext cx="9071280" cy="1250280"/>
           </a:xfrm>
           <a:prstGeom prst="rect">
             <a:avLst/>
@@ -1054,7 +2172,7 @@
         <p:spPr>
           <a:xfrm>
             <a:off x="504000" y="1326600"/>
-            <a:ext cx="9071640" cy="3288240"/>
+            <a:ext cx="9071280" cy="3287880"/>
           </a:xfrm>
           <a:prstGeom prst="rect">
             <a:avLst/>
@@ -1088,7 +2206,7 @@
             <a:spLocks noGrp="1"/>
           </p:cNvSpPr>
           <p:nvPr>
-            <p:ph type="ftr" idx="2"/>
+            <p:ph type="ftr" idx="1"/>
           </p:nvPr>
         </p:nvSpPr>
         <p:spPr/>
@@ -1108,14 +2226,14 @@
             <a:spLocks noGrp="1"/>
           </p:cNvSpPr>
           <p:nvPr>
-            <p:ph type="sldNum" idx="3"/>
+            <p:ph type="sldNum" idx="2"/>
           </p:nvPr>
         </p:nvSpPr>
         <p:spPr/>
         <p:txBody>
           <a:bodyPr/>
           <a:p>
-            <a:fld id="{5CAAE943-94A7-4439-ABDD-76097DF865E1}" type="slidenum">
+            <a:fld id="{D5EA6097-6EC4-4814-AE88-F57118714FD3}" type="slidenum">
               <a:t>&lt;#&gt;</a:t>
             </a:fld>
           </a:p>
@@ -1128,7 +2246,1396 @@
             <a:spLocks noGrp="1"/>
           </p:cNvSpPr>
           <p:nvPr>
-            <p:ph type="dt" idx="1"/>
+            <p:ph type="dt" idx="3"/>
+          </p:nvPr>
+        </p:nvSpPr>
+        <p:spPr/>
+        <p:txBody>
+          <a:bodyPr/>
+          <a:p>
+            <a:r>
+              <a:rPr lang="ru-RU"/>
+              <a:t/>
+            </a:r>
+          </a:p>
+        </p:txBody>
+      </p:sp>
+    </p:spTree>
+  </p:cSld>
+</p:sldLayout>
+</file>
+
+<file path=ppt/slideLayouts/slideLayout20.xml><?xml version="1.0" encoding="utf-8"?>
+<p:sldLayout xmlns:a="http://schemas.openxmlformats.org/drawingml/2006/main" xmlns:p="http://schemas.openxmlformats.org/presentationml/2006/main" xmlns:r="http://schemas.openxmlformats.org/officeDocument/2006/relationships" xmlns:p14="http://schemas.microsoft.com/office/powerpoint/2010/main" xmlns:p15="http://schemas.microsoft.com/office/powerpoint/2012/main" xmlns:mc="http://schemas.openxmlformats.org/markup-compatibility/2006" type="objAndTwoObj" preserve="1">
+  <p:cSld name="Title Content and 2 Content">
+    <p:spTree>
+      <p:nvGrpSpPr>
+        <p:cNvPr id="1" name=""/>
+        <p:cNvGrpSpPr/>
+        <p:nvPr/>
+      </p:nvGrpSpPr>
+      <p:grpSpPr>
+        <a:xfrm>
+          <a:off x="0" y="0"/>
+          <a:ext cx="0" cy="0"/>
+          <a:chOff x="0" y="0"/>
+          <a:chExt cx="0" cy="0"/>
+        </a:xfrm>
+      </p:grpSpPr>
+      <p:sp>
+        <p:nvSpPr>
+          <p:cNvPr id="59" name="PlaceHolder 1"/>
+          <p:cNvSpPr>
+            <a:spLocks noGrp="1"/>
+          </p:cNvSpPr>
+          <p:nvPr>
+            <p:ph type="title"/>
+          </p:nvPr>
+        </p:nvSpPr>
+        <p:spPr>
+          <a:xfrm>
+            <a:off x="504000" y="74160"/>
+            <a:ext cx="9071280" cy="1250280"/>
+          </a:xfrm>
+          <a:prstGeom prst="rect">
+            <a:avLst/>
+          </a:prstGeom>
+          <a:noFill/>
+          <a:ln w="0">
+            <a:noFill/>
+          </a:ln>
+        </p:spPr>
+        <p:txBody>
+          <a:bodyPr lIns="0" rIns="0" tIns="0" bIns="0" anchor="ctr">
+            <a:noAutofit/>
+          </a:bodyPr>
+          <a:p>
+            <a:pPr indent="0" algn="ctr">
+              <a:buNone/>
+            </a:pPr>
+            <a:endParaRPr b="0" lang="ru-RU" sz="4400" spc="-1" strike="noStrike">
+              <a:solidFill>
+                <a:srgbClr val="000000"/>
+              </a:solidFill>
+              <a:latin typeface="Arial"/>
+            </a:endParaRPr>
+          </a:p>
+        </p:txBody>
+      </p:sp>
+      <p:sp>
+        <p:nvSpPr>
+          <p:cNvPr id="60" name="PlaceHolder 2"/>
+          <p:cNvSpPr>
+            <a:spLocks noGrp="1"/>
+          </p:cNvSpPr>
+          <p:nvPr>
+            <p:ph/>
+          </p:nvPr>
+        </p:nvSpPr>
+        <p:spPr>
+          <a:xfrm>
+            <a:off x="504000" y="1326600"/>
+            <a:ext cx="4426560" cy="3287880"/>
+          </a:xfrm>
+          <a:prstGeom prst="rect">
+            <a:avLst/>
+          </a:prstGeom>
+          <a:noFill/>
+          <a:ln w="0">
+            <a:noFill/>
+          </a:ln>
+        </p:spPr>
+        <p:txBody>
+          <a:bodyPr lIns="0" rIns="0" tIns="0" bIns="0" anchor="t">
+            <a:normAutofit/>
+          </a:bodyPr>
+          <a:p>
+            <a:pPr indent="0">
+              <a:spcBef>
+                <a:spcPts val="1417"/>
+              </a:spcBef>
+              <a:buNone/>
+            </a:pPr>
+            <a:endParaRPr b="0" lang="ru-RU" sz="3200" spc="-1" strike="noStrike">
+              <a:solidFill>
+                <a:srgbClr val="000000"/>
+              </a:solidFill>
+              <a:latin typeface="Arial"/>
+            </a:endParaRPr>
+          </a:p>
+        </p:txBody>
+      </p:sp>
+      <p:sp>
+        <p:nvSpPr>
+          <p:cNvPr id="61" name="PlaceHolder 3"/>
+          <p:cNvSpPr>
+            <a:spLocks noGrp="1"/>
+          </p:cNvSpPr>
+          <p:nvPr>
+            <p:ph/>
+          </p:nvPr>
+        </p:nvSpPr>
+        <p:spPr>
+          <a:xfrm>
+            <a:off x="5152320" y="1326600"/>
+            <a:ext cx="4426560" cy="1568160"/>
+          </a:xfrm>
+          <a:prstGeom prst="rect">
+            <a:avLst/>
+          </a:prstGeom>
+          <a:noFill/>
+          <a:ln w="0">
+            <a:noFill/>
+          </a:ln>
+        </p:spPr>
+        <p:txBody>
+          <a:bodyPr lIns="0" rIns="0" tIns="0" bIns="0" anchor="t">
+            <a:normAutofit/>
+          </a:bodyPr>
+          <a:p>
+            <a:pPr indent="0">
+              <a:spcBef>
+                <a:spcPts val="1417"/>
+              </a:spcBef>
+              <a:buNone/>
+            </a:pPr>
+            <a:endParaRPr b="0" lang="ru-RU" sz="3200" spc="-1" strike="noStrike">
+              <a:solidFill>
+                <a:srgbClr val="000000"/>
+              </a:solidFill>
+              <a:latin typeface="Arial"/>
+            </a:endParaRPr>
+          </a:p>
+        </p:txBody>
+      </p:sp>
+      <p:sp>
+        <p:nvSpPr>
+          <p:cNvPr id="62" name="PlaceHolder 4"/>
+          <p:cNvSpPr>
+            <a:spLocks noGrp="1"/>
+          </p:cNvSpPr>
+          <p:nvPr>
+            <p:ph/>
+          </p:nvPr>
+        </p:nvSpPr>
+        <p:spPr>
+          <a:xfrm>
+            <a:off x="5152320" y="3044160"/>
+            <a:ext cx="4426560" cy="1568160"/>
+          </a:xfrm>
+          <a:prstGeom prst="rect">
+            <a:avLst/>
+          </a:prstGeom>
+          <a:noFill/>
+          <a:ln w="0">
+            <a:noFill/>
+          </a:ln>
+        </p:spPr>
+        <p:txBody>
+          <a:bodyPr lIns="0" rIns="0" tIns="0" bIns="0" anchor="t">
+            <a:normAutofit/>
+          </a:bodyPr>
+          <a:p>
+            <a:pPr indent="0">
+              <a:spcBef>
+                <a:spcPts val="1417"/>
+              </a:spcBef>
+              <a:buNone/>
+            </a:pPr>
+            <a:endParaRPr b="0" lang="ru-RU" sz="3200" spc="-1" strike="noStrike">
+              <a:solidFill>
+                <a:srgbClr val="000000"/>
+              </a:solidFill>
+              <a:latin typeface="Arial"/>
+            </a:endParaRPr>
+          </a:p>
+        </p:txBody>
+      </p:sp>
+      <p:sp>
+        <p:nvSpPr>
+          <p:cNvPr id="6" name="PlaceHolder 5"/>
+          <p:cNvSpPr>
+            <a:spLocks noGrp="1"/>
+          </p:cNvSpPr>
+          <p:nvPr>
+            <p:ph type="ftr" idx="4"/>
+          </p:nvPr>
+        </p:nvSpPr>
+        <p:spPr/>
+        <p:txBody>
+          <a:bodyPr/>
+          <a:p>
+            <a:r>
+              <a:t>Footer</a:t>
+            </a:r>
+          </a:p>
+        </p:txBody>
+      </p:sp>
+      <p:sp>
+        <p:nvSpPr>
+          <p:cNvPr id="7" name="PlaceHolder 6"/>
+          <p:cNvSpPr>
+            <a:spLocks noGrp="1"/>
+          </p:cNvSpPr>
+          <p:nvPr>
+            <p:ph type="sldNum" idx="5"/>
+          </p:nvPr>
+        </p:nvSpPr>
+        <p:spPr/>
+        <p:txBody>
+          <a:bodyPr/>
+          <a:p>
+            <a:fld id="{DDFAFAE4-2BAB-403E-B6D5-D53A79E3491F}" type="slidenum">
+              <a:t>&lt;#&gt;</a:t>
+            </a:fld>
+          </a:p>
+        </p:txBody>
+      </p:sp>
+      <p:sp>
+        <p:nvSpPr>
+          <p:cNvPr id="8" name="PlaceHolder 7"/>
+          <p:cNvSpPr>
+            <a:spLocks noGrp="1"/>
+          </p:cNvSpPr>
+          <p:nvPr>
+            <p:ph type="dt" idx="6"/>
+          </p:nvPr>
+        </p:nvSpPr>
+        <p:spPr/>
+        <p:txBody>
+          <a:bodyPr/>
+          <a:p>
+            <a:r>
+              <a:rPr lang="ru-RU"/>
+              <a:t/>
+            </a:r>
+          </a:p>
+        </p:txBody>
+      </p:sp>
+    </p:spTree>
+  </p:cSld>
+</p:sldLayout>
+</file>
+
+<file path=ppt/slideLayouts/slideLayout21.xml><?xml version="1.0" encoding="utf-8"?>
+<p:sldLayout xmlns:a="http://schemas.openxmlformats.org/drawingml/2006/main" xmlns:p="http://schemas.openxmlformats.org/presentationml/2006/main" xmlns:r="http://schemas.openxmlformats.org/officeDocument/2006/relationships" xmlns:p14="http://schemas.microsoft.com/office/powerpoint/2010/main" xmlns:p15="http://schemas.microsoft.com/office/powerpoint/2012/main" xmlns:mc="http://schemas.openxmlformats.org/markup-compatibility/2006" type="twoObjOverTx" preserve="1">
+  <p:cSld name="Title, 2 Content over Content">
+    <p:spTree>
+      <p:nvGrpSpPr>
+        <p:cNvPr id="1" name=""/>
+        <p:cNvGrpSpPr/>
+        <p:nvPr/>
+      </p:nvGrpSpPr>
+      <p:grpSpPr>
+        <a:xfrm>
+          <a:off x="0" y="0"/>
+          <a:ext cx="0" cy="0"/>
+          <a:chOff x="0" y="0"/>
+          <a:chExt cx="0" cy="0"/>
+        </a:xfrm>
+      </p:grpSpPr>
+      <p:sp>
+        <p:nvSpPr>
+          <p:cNvPr id="63" name="PlaceHolder 1"/>
+          <p:cNvSpPr>
+            <a:spLocks noGrp="1"/>
+          </p:cNvSpPr>
+          <p:nvPr>
+            <p:ph type="title"/>
+          </p:nvPr>
+        </p:nvSpPr>
+        <p:spPr>
+          <a:xfrm>
+            <a:off x="504000" y="74160"/>
+            <a:ext cx="9071280" cy="1250280"/>
+          </a:xfrm>
+          <a:prstGeom prst="rect">
+            <a:avLst/>
+          </a:prstGeom>
+          <a:noFill/>
+          <a:ln w="0">
+            <a:noFill/>
+          </a:ln>
+        </p:spPr>
+        <p:txBody>
+          <a:bodyPr lIns="0" rIns="0" tIns="0" bIns="0" anchor="ctr">
+            <a:noAutofit/>
+          </a:bodyPr>
+          <a:p>
+            <a:pPr indent="0" algn="ctr">
+              <a:buNone/>
+            </a:pPr>
+            <a:endParaRPr b="0" lang="ru-RU" sz="4400" spc="-1" strike="noStrike">
+              <a:solidFill>
+                <a:srgbClr val="000000"/>
+              </a:solidFill>
+              <a:latin typeface="Arial"/>
+            </a:endParaRPr>
+          </a:p>
+        </p:txBody>
+      </p:sp>
+      <p:sp>
+        <p:nvSpPr>
+          <p:cNvPr id="64" name="PlaceHolder 2"/>
+          <p:cNvSpPr>
+            <a:spLocks noGrp="1"/>
+          </p:cNvSpPr>
+          <p:nvPr>
+            <p:ph/>
+          </p:nvPr>
+        </p:nvSpPr>
+        <p:spPr>
+          <a:xfrm>
+            <a:off x="504000" y="1326600"/>
+            <a:ext cx="4426560" cy="1568160"/>
+          </a:xfrm>
+          <a:prstGeom prst="rect">
+            <a:avLst/>
+          </a:prstGeom>
+          <a:noFill/>
+          <a:ln w="0">
+            <a:noFill/>
+          </a:ln>
+        </p:spPr>
+        <p:txBody>
+          <a:bodyPr lIns="0" rIns="0" tIns="0" bIns="0" anchor="t">
+            <a:normAutofit/>
+          </a:bodyPr>
+          <a:p>
+            <a:pPr indent="0">
+              <a:spcBef>
+                <a:spcPts val="1417"/>
+              </a:spcBef>
+              <a:buNone/>
+            </a:pPr>
+            <a:endParaRPr b="0" lang="ru-RU" sz="3200" spc="-1" strike="noStrike">
+              <a:solidFill>
+                <a:srgbClr val="000000"/>
+              </a:solidFill>
+              <a:latin typeface="Arial"/>
+            </a:endParaRPr>
+          </a:p>
+        </p:txBody>
+      </p:sp>
+      <p:sp>
+        <p:nvSpPr>
+          <p:cNvPr id="65" name="PlaceHolder 3"/>
+          <p:cNvSpPr>
+            <a:spLocks noGrp="1"/>
+          </p:cNvSpPr>
+          <p:nvPr>
+            <p:ph/>
+          </p:nvPr>
+        </p:nvSpPr>
+        <p:spPr>
+          <a:xfrm>
+            <a:off x="5152320" y="1326600"/>
+            <a:ext cx="4426560" cy="1568160"/>
+          </a:xfrm>
+          <a:prstGeom prst="rect">
+            <a:avLst/>
+          </a:prstGeom>
+          <a:noFill/>
+          <a:ln w="0">
+            <a:noFill/>
+          </a:ln>
+        </p:spPr>
+        <p:txBody>
+          <a:bodyPr lIns="0" rIns="0" tIns="0" bIns="0" anchor="t">
+            <a:normAutofit/>
+          </a:bodyPr>
+          <a:p>
+            <a:pPr indent="0">
+              <a:spcBef>
+                <a:spcPts val="1417"/>
+              </a:spcBef>
+              <a:buNone/>
+            </a:pPr>
+            <a:endParaRPr b="0" lang="ru-RU" sz="3200" spc="-1" strike="noStrike">
+              <a:solidFill>
+                <a:srgbClr val="000000"/>
+              </a:solidFill>
+              <a:latin typeface="Arial"/>
+            </a:endParaRPr>
+          </a:p>
+        </p:txBody>
+      </p:sp>
+      <p:sp>
+        <p:nvSpPr>
+          <p:cNvPr id="66" name="PlaceHolder 4"/>
+          <p:cNvSpPr>
+            <a:spLocks noGrp="1"/>
+          </p:cNvSpPr>
+          <p:nvPr>
+            <p:ph/>
+          </p:nvPr>
+        </p:nvSpPr>
+        <p:spPr>
+          <a:xfrm>
+            <a:off x="504000" y="3044160"/>
+            <a:ext cx="9071280" cy="1568160"/>
+          </a:xfrm>
+          <a:prstGeom prst="rect">
+            <a:avLst/>
+          </a:prstGeom>
+          <a:noFill/>
+          <a:ln w="0">
+            <a:noFill/>
+          </a:ln>
+        </p:spPr>
+        <p:txBody>
+          <a:bodyPr lIns="0" rIns="0" tIns="0" bIns="0" anchor="t">
+            <a:normAutofit/>
+          </a:bodyPr>
+          <a:p>
+            <a:pPr indent="0">
+              <a:spcBef>
+                <a:spcPts val="1417"/>
+              </a:spcBef>
+              <a:buNone/>
+            </a:pPr>
+            <a:endParaRPr b="0" lang="ru-RU" sz="3200" spc="-1" strike="noStrike">
+              <a:solidFill>
+                <a:srgbClr val="000000"/>
+              </a:solidFill>
+              <a:latin typeface="Arial"/>
+            </a:endParaRPr>
+          </a:p>
+        </p:txBody>
+      </p:sp>
+      <p:sp>
+        <p:nvSpPr>
+          <p:cNvPr id="6" name="PlaceHolder 5"/>
+          <p:cNvSpPr>
+            <a:spLocks noGrp="1"/>
+          </p:cNvSpPr>
+          <p:nvPr>
+            <p:ph type="ftr" idx="4"/>
+          </p:nvPr>
+        </p:nvSpPr>
+        <p:spPr/>
+        <p:txBody>
+          <a:bodyPr/>
+          <a:p>
+            <a:r>
+              <a:t>Footer</a:t>
+            </a:r>
+          </a:p>
+        </p:txBody>
+      </p:sp>
+      <p:sp>
+        <p:nvSpPr>
+          <p:cNvPr id="7" name="PlaceHolder 6"/>
+          <p:cNvSpPr>
+            <a:spLocks noGrp="1"/>
+          </p:cNvSpPr>
+          <p:nvPr>
+            <p:ph type="sldNum" idx="5"/>
+          </p:nvPr>
+        </p:nvSpPr>
+        <p:spPr/>
+        <p:txBody>
+          <a:bodyPr/>
+          <a:p>
+            <a:fld id="{0EFEBDA8-7286-4D64-BA0E-63C81E6D04BA}" type="slidenum">
+              <a:t>&lt;#&gt;</a:t>
+            </a:fld>
+          </a:p>
+        </p:txBody>
+      </p:sp>
+      <p:sp>
+        <p:nvSpPr>
+          <p:cNvPr id="8" name="PlaceHolder 7"/>
+          <p:cNvSpPr>
+            <a:spLocks noGrp="1"/>
+          </p:cNvSpPr>
+          <p:nvPr>
+            <p:ph type="dt" idx="6"/>
+          </p:nvPr>
+        </p:nvSpPr>
+        <p:spPr/>
+        <p:txBody>
+          <a:bodyPr/>
+          <a:p>
+            <a:r>
+              <a:rPr lang="ru-RU"/>
+              <a:t/>
+            </a:r>
+          </a:p>
+        </p:txBody>
+      </p:sp>
+    </p:spTree>
+  </p:cSld>
+</p:sldLayout>
+</file>
+
+<file path=ppt/slideLayouts/slideLayout22.xml><?xml version="1.0" encoding="utf-8"?>
+<p:sldLayout xmlns:a="http://schemas.openxmlformats.org/drawingml/2006/main" xmlns:p="http://schemas.openxmlformats.org/presentationml/2006/main" xmlns:r="http://schemas.openxmlformats.org/officeDocument/2006/relationships" xmlns:p14="http://schemas.microsoft.com/office/powerpoint/2010/main" xmlns:p15="http://schemas.microsoft.com/office/powerpoint/2012/main" xmlns:mc="http://schemas.openxmlformats.org/markup-compatibility/2006" type="objOverTx" preserve="1">
+  <p:cSld name="Title, Content over Content">
+    <p:spTree>
+      <p:nvGrpSpPr>
+        <p:cNvPr id="1" name=""/>
+        <p:cNvGrpSpPr/>
+        <p:nvPr/>
+      </p:nvGrpSpPr>
+      <p:grpSpPr>
+        <a:xfrm>
+          <a:off x="0" y="0"/>
+          <a:ext cx="0" cy="0"/>
+          <a:chOff x="0" y="0"/>
+          <a:chExt cx="0" cy="0"/>
+        </a:xfrm>
+      </p:grpSpPr>
+      <p:sp>
+        <p:nvSpPr>
+          <p:cNvPr id="67" name="PlaceHolder 1"/>
+          <p:cNvSpPr>
+            <a:spLocks noGrp="1"/>
+          </p:cNvSpPr>
+          <p:nvPr>
+            <p:ph type="title"/>
+          </p:nvPr>
+        </p:nvSpPr>
+        <p:spPr>
+          <a:xfrm>
+            <a:off x="504000" y="74160"/>
+            <a:ext cx="9071280" cy="1250280"/>
+          </a:xfrm>
+          <a:prstGeom prst="rect">
+            <a:avLst/>
+          </a:prstGeom>
+          <a:noFill/>
+          <a:ln w="0">
+            <a:noFill/>
+          </a:ln>
+        </p:spPr>
+        <p:txBody>
+          <a:bodyPr lIns="0" rIns="0" tIns="0" bIns="0" anchor="ctr">
+            <a:noAutofit/>
+          </a:bodyPr>
+          <a:p>
+            <a:pPr indent="0" algn="ctr">
+              <a:buNone/>
+            </a:pPr>
+            <a:endParaRPr b="0" lang="ru-RU" sz="4400" spc="-1" strike="noStrike">
+              <a:solidFill>
+                <a:srgbClr val="000000"/>
+              </a:solidFill>
+              <a:latin typeface="Arial"/>
+            </a:endParaRPr>
+          </a:p>
+        </p:txBody>
+      </p:sp>
+      <p:sp>
+        <p:nvSpPr>
+          <p:cNvPr id="68" name="PlaceHolder 2"/>
+          <p:cNvSpPr>
+            <a:spLocks noGrp="1"/>
+          </p:cNvSpPr>
+          <p:nvPr>
+            <p:ph/>
+          </p:nvPr>
+        </p:nvSpPr>
+        <p:spPr>
+          <a:xfrm>
+            <a:off x="504000" y="1326600"/>
+            <a:ext cx="9071280" cy="1568160"/>
+          </a:xfrm>
+          <a:prstGeom prst="rect">
+            <a:avLst/>
+          </a:prstGeom>
+          <a:noFill/>
+          <a:ln w="0">
+            <a:noFill/>
+          </a:ln>
+        </p:spPr>
+        <p:txBody>
+          <a:bodyPr lIns="0" rIns="0" tIns="0" bIns="0" anchor="t">
+            <a:normAutofit/>
+          </a:bodyPr>
+          <a:p>
+            <a:pPr indent="0">
+              <a:spcBef>
+                <a:spcPts val="1417"/>
+              </a:spcBef>
+              <a:buNone/>
+            </a:pPr>
+            <a:endParaRPr b="0" lang="ru-RU" sz="3200" spc="-1" strike="noStrike">
+              <a:solidFill>
+                <a:srgbClr val="000000"/>
+              </a:solidFill>
+              <a:latin typeface="Arial"/>
+            </a:endParaRPr>
+          </a:p>
+        </p:txBody>
+      </p:sp>
+      <p:sp>
+        <p:nvSpPr>
+          <p:cNvPr id="69" name="PlaceHolder 3"/>
+          <p:cNvSpPr>
+            <a:spLocks noGrp="1"/>
+          </p:cNvSpPr>
+          <p:nvPr>
+            <p:ph/>
+          </p:nvPr>
+        </p:nvSpPr>
+        <p:spPr>
+          <a:xfrm>
+            <a:off x="504000" y="3044160"/>
+            <a:ext cx="9071280" cy="1568160"/>
+          </a:xfrm>
+          <a:prstGeom prst="rect">
+            <a:avLst/>
+          </a:prstGeom>
+          <a:noFill/>
+          <a:ln w="0">
+            <a:noFill/>
+          </a:ln>
+        </p:spPr>
+        <p:txBody>
+          <a:bodyPr lIns="0" rIns="0" tIns="0" bIns="0" anchor="t">
+            <a:normAutofit/>
+          </a:bodyPr>
+          <a:p>
+            <a:pPr indent="0">
+              <a:spcBef>
+                <a:spcPts val="1417"/>
+              </a:spcBef>
+              <a:buNone/>
+            </a:pPr>
+            <a:endParaRPr b="0" lang="ru-RU" sz="3200" spc="-1" strike="noStrike">
+              <a:solidFill>
+                <a:srgbClr val="000000"/>
+              </a:solidFill>
+              <a:latin typeface="Arial"/>
+            </a:endParaRPr>
+          </a:p>
+        </p:txBody>
+      </p:sp>
+      <p:sp>
+        <p:nvSpPr>
+          <p:cNvPr id="5" name="PlaceHolder 4"/>
+          <p:cNvSpPr>
+            <a:spLocks noGrp="1"/>
+          </p:cNvSpPr>
+          <p:nvPr>
+            <p:ph type="ftr" idx="4"/>
+          </p:nvPr>
+        </p:nvSpPr>
+        <p:spPr/>
+        <p:txBody>
+          <a:bodyPr/>
+          <a:p>
+            <a:r>
+              <a:t>Footer</a:t>
+            </a:r>
+          </a:p>
+        </p:txBody>
+      </p:sp>
+      <p:sp>
+        <p:nvSpPr>
+          <p:cNvPr id="6" name="PlaceHolder 5"/>
+          <p:cNvSpPr>
+            <a:spLocks noGrp="1"/>
+          </p:cNvSpPr>
+          <p:nvPr>
+            <p:ph type="sldNum" idx="5"/>
+          </p:nvPr>
+        </p:nvSpPr>
+        <p:spPr/>
+        <p:txBody>
+          <a:bodyPr/>
+          <a:p>
+            <a:fld id="{E26D7EDF-F439-40E6-BCA7-8EDC1502DB73}" type="slidenum">
+              <a:t>&lt;#&gt;</a:t>
+            </a:fld>
+          </a:p>
+        </p:txBody>
+      </p:sp>
+      <p:sp>
+        <p:nvSpPr>
+          <p:cNvPr id="7" name="PlaceHolder 6"/>
+          <p:cNvSpPr>
+            <a:spLocks noGrp="1"/>
+          </p:cNvSpPr>
+          <p:nvPr>
+            <p:ph type="dt" idx="6"/>
+          </p:nvPr>
+        </p:nvSpPr>
+        <p:spPr/>
+        <p:txBody>
+          <a:bodyPr/>
+          <a:p>
+            <a:r>
+              <a:rPr lang="ru-RU"/>
+              <a:t/>
+            </a:r>
+          </a:p>
+        </p:txBody>
+      </p:sp>
+    </p:spTree>
+  </p:cSld>
+</p:sldLayout>
+</file>
+
+<file path=ppt/slideLayouts/slideLayout23.xml><?xml version="1.0" encoding="utf-8"?>
+<p:sldLayout xmlns:a="http://schemas.openxmlformats.org/drawingml/2006/main" xmlns:p="http://schemas.openxmlformats.org/presentationml/2006/main" xmlns:r="http://schemas.openxmlformats.org/officeDocument/2006/relationships" xmlns:p14="http://schemas.microsoft.com/office/powerpoint/2010/main" xmlns:p15="http://schemas.microsoft.com/office/powerpoint/2012/main" xmlns:mc="http://schemas.openxmlformats.org/markup-compatibility/2006" type="fourObj" preserve="1">
+  <p:cSld name="Title, 4 Content">
+    <p:spTree>
+      <p:nvGrpSpPr>
+        <p:cNvPr id="1" name=""/>
+        <p:cNvGrpSpPr/>
+        <p:nvPr/>
+      </p:nvGrpSpPr>
+      <p:grpSpPr>
+        <a:xfrm>
+          <a:off x="0" y="0"/>
+          <a:ext cx="0" cy="0"/>
+          <a:chOff x="0" y="0"/>
+          <a:chExt cx="0" cy="0"/>
+        </a:xfrm>
+      </p:grpSpPr>
+      <p:sp>
+        <p:nvSpPr>
+          <p:cNvPr id="70" name="PlaceHolder 1"/>
+          <p:cNvSpPr>
+            <a:spLocks noGrp="1"/>
+          </p:cNvSpPr>
+          <p:nvPr>
+            <p:ph type="title"/>
+          </p:nvPr>
+        </p:nvSpPr>
+        <p:spPr>
+          <a:xfrm>
+            <a:off x="504000" y="74160"/>
+            <a:ext cx="9071280" cy="1250280"/>
+          </a:xfrm>
+          <a:prstGeom prst="rect">
+            <a:avLst/>
+          </a:prstGeom>
+          <a:noFill/>
+          <a:ln w="0">
+            <a:noFill/>
+          </a:ln>
+        </p:spPr>
+        <p:txBody>
+          <a:bodyPr lIns="0" rIns="0" tIns="0" bIns="0" anchor="ctr">
+            <a:noAutofit/>
+          </a:bodyPr>
+          <a:p>
+            <a:pPr indent="0" algn="ctr">
+              <a:buNone/>
+            </a:pPr>
+            <a:endParaRPr b="0" lang="ru-RU" sz="4400" spc="-1" strike="noStrike">
+              <a:solidFill>
+                <a:srgbClr val="000000"/>
+              </a:solidFill>
+              <a:latin typeface="Arial"/>
+            </a:endParaRPr>
+          </a:p>
+        </p:txBody>
+      </p:sp>
+      <p:sp>
+        <p:nvSpPr>
+          <p:cNvPr id="71" name="PlaceHolder 2"/>
+          <p:cNvSpPr>
+            <a:spLocks noGrp="1"/>
+          </p:cNvSpPr>
+          <p:nvPr>
+            <p:ph/>
+          </p:nvPr>
+        </p:nvSpPr>
+        <p:spPr>
+          <a:xfrm>
+            <a:off x="504000" y="1326600"/>
+            <a:ext cx="4426560" cy="1568160"/>
+          </a:xfrm>
+          <a:prstGeom prst="rect">
+            <a:avLst/>
+          </a:prstGeom>
+          <a:noFill/>
+          <a:ln w="0">
+            <a:noFill/>
+          </a:ln>
+        </p:spPr>
+        <p:txBody>
+          <a:bodyPr lIns="0" rIns="0" tIns="0" bIns="0" anchor="t">
+            <a:normAutofit/>
+          </a:bodyPr>
+          <a:p>
+            <a:pPr indent="0">
+              <a:spcBef>
+                <a:spcPts val="1417"/>
+              </a:spcBef>
+              <a:buNone/>
+            </a:pPr>
+            <a:endParaRPr b="0" lang="ru-RU" sz="3200" spc="-1" strike="noStrike">
+              <a:solidFill>
+                <a:srgbClr val="000000"/>
+              </a:solidFill>
+              <a:latin typeface="Arial"/>
+            </a:endParaRPr>
+          </a:p>
+        </p:txBody>
+      </p:sp>
+      <p:sp>
+        <p:nvSpPr>
+          <p:cNvPr id="72" name="PlaceHolder 3"/>
+          <p:cNvSpPr>
+            <a:spLocks noGrp="1"/>
+          </p:cNvSpPr>
+          <p:nvPr>
+            <p:ph/>
+          </p:nvPr>
+        </p:nvSpPr>
+        <p:spPr>
+          <a:xfrm>
+            <a:off x="5152320" y="1326600"/>
+            <a:ext cx="4426560" cy="1568160"/>
+          </a:xfrm>
+          <a:prstGeom prst="rect">
+            <a:avLst/>
+          </a:prstGeom>
+          <a:noFill/>
+          <a:ln w="0">
+            <a:noFill/>
+          </a:ln>
+        </p:spPr>
+        <p:txBody>
+          <a:bodyPr lIns="0" rIns="0" tIns="0" bIns="0" anchor="t">
+            <a:normAutofit/>
+          </a:bodyPr>
+          <a:p>
+            <a:pPr indent="0">
+              <a:spcBef>
+                <a:spcPts val="1417"/>
+              </a:spcBef>
+              <a:buNone/>
+            </a:pPr>
+            <a:endParaRPr b="0" lang="ru-RU" sz="3200" spc="-1" strike="noStrike">
+              <a:solidFill>
+                <a:srgbClr val="000000"/>
+              </a:solidFill>
+              <a:latin typeface="Arial"/>
+            </a:endParaRPr>
+          </a:p>
+        </p:txBody>
+      </p:sp>
+      <p:sp>
+        <p:nvSpPr>
+          <p:cNvPr id="73" name="PlaceHolder 4"/>
+          <p:cNvSpPr>
+            <a:spLocks noGrp="1"/>
+          </p:cNvSpPr>
+          <p:nvPr>
+            <p:ph/>
+          </p:nvPr>
+        </p:nvSpPr>
+        <p:spPr>
+          <a:xfrm>
+            <a:off x="504000" y="3044160"/>
+            <a:ext cx="4426560" cy="1568160"/>
+          </a:xfrm>
+          <a:prstGeom prst="rect">
+            <a:avLst/>
+          </a:prstGeom>
+          <a:noFill/>
+          <a:ln w="0">
+            <a:noFill/>
+          </a:ln>
+        </p:spPr>
+        <p:txBody>
+          <a:bodyPr lIns="0" rIns="0" tIns="0" bIns="0" anchor="t">
+            <a:normAutofit/>
+          </a:bodyPr>
+          <a:p>
+            <a:pPr indent="0">
+              <a:spcBef>
+                <a:spcPts val="1417"/>
+              </a:spcBef>
+              <a:buNone/>
+            </a:pPr>
+            <a:endParaRPr b="0" lang="ru-RU" sz="3200" spc="-1" strike="noStrike">
+              <a:solidFill>
+                <a:srgbClr val="000000"/>
+              </a:solidFill>
+              <a:latin typeface="Arial"/>
+            </a:endParaRPr>
+          </a:p>
+        </p:txBody>
+      </p:sp>
+      <p:sp>
+        <p:nvSpPr>
+          <p:cNvPr id="74" name="PlaceHolder 5"/>
+          <p:cNvSpPr>
+            <a:spLocks noGrp="1"/>
+          </p:cNvSpPr>
+          <p:nvPr>
+            <p:ph/>
+          </p:nvPr>
+        </p:nvSpPr>
+        <p:spPr>
+          <a:xfrm>
+            <a:off x="5152320" y="3044160"/>
+            <a:ext cx="4426560" cy="1568160"/>
+          </a:xfrm>
+          <a:prstGeom prst="rect">
+            <a:avLst/>
+          </a:prstGeom>
+          <a:noFill/>
+          <a:ln w="0">
+            <a:noFill/>
+          </a:ln>
+        </p:spPr>
+        <p:txBody>
+          <a:bodyPr lIns="0" rIns="0" tIns="0" bIns="0" anchor="t">
+            <a:normAutofit/>
+          </a:bodyPr>
+          <a:p>
+            <a:pPr indent="0">
+              <a:spcBef>
+                <a:spcPts val="1417"/>
+              </a:spcBef>
+              <a:buNone/>
+            </a:pPr>
+            <a:endParaRPr b="0" lang="ru-RU" sz="3200" spc="-1" strike="noStrike">
+              <a:solidFill>
+                <a:srgbClr val="000000"/>
+              </a:solidFill>
+              <a:latin typeface="Arial"/>
+            </a:endParaRPr>
+          </a:p>
+        </p:txBody>
+      </p:sp>
+      <p:sp>
+        <p:nvSpPr>
+          <p:cNvPr id="7" name="PlaceHolder 6"/>
+          <p:cNvSpPr>
+            <a:spLocks noGrp="1"/>
+          </p:cNvSpPr>
+          <p:nvPr>
+            <p:ph type="ftr" idx="4"/>
+          </p:nvPr>
+        </p:nvSpPr>
+        <p:spPr/>
+        <p:txBody>
+          <a:bodyPr/>
+          <a:p>
+            <a:r>
+              <a:t>Footer</a:t>
+            </a:r>
+          </a:p>
+        </p:txBody>
+      </p:sp>
+      <p:sp>
+        <p:nvSpPr>
+          <p:cNvPr id="8" name="PlaceHolder 7"/>
+          <p:cNvSpPr>
+            <a:spLocks noGrp="1"/>
+          </p:cNvSpPr>
+          <p:nvPr>
+            <p:ph type="sldNum" idx="5"/>
+          </p:nvPr>
+        </p:nvSpPr>
+        <p:spPr/>
+        <p:txBody>
+          <a:bodyPr/>
+          <a:p>
+            <a:fld id="{CDDA9033-FD5D-48D8-9552-03351A790E74}" type="slidenum">
+              <a:t>&lt;#&gt;</a:t>
+            </a:fld>
+          </a:p>
+        </p:txBody>
+      </p:sp>
+      <p:sp>
+        <p:nvSpPr>
+          <p:cNvPr id="9" name="PlaceHolder 8"/>
+          <p:cNvSpPr>
+            <a:spLocks noGrp="1"/>
+          </p:cNvSpPr>
+          <p:nvPr>
+            <p:ph type="dt" idx="6"/>
+          </p:nvPr>
+        </p:nvSpPr>
+        <p:spPr/>
+        <p:txBody>
+          <a:bodyPr/>
+          <a:p>
+            <a:r>
+              <a:rPr lang="ru-RU"/>
+              <a:t/>
+            </a:r>
+          </a:p>
+        </p:txBody>
+      </p:sp>
+    </p:spTree>
+  </p:cSld>
+</p:sldLayout>
+</file>
+
+<file path=ppt/slideLayouts/slideLayout24.xml><?xml version="1.0" encoding="utf-8"?>
+<p:sldLayout xmlns:a="http://schemas.openxmlformats.org/drawingml/2006/main" xmlns:p="http://schemas.openxmlformats.org/presentationml/2006/main" xmlns:r="http://schemas.openxmlformats.org/officeDocument/2006/relationships" xmlns:p14="http://schemas.microsoft.com/office/powerpoint/2010/main" xmlns:p15="http://schemas.microsoft.com/office/powerpoint/2012/main" xmlns:mc="http://schemas.openxmlformats.org/markup-compatibility/2006" type="blank" preserve="1">
+  <p:cSld name="Title, 6 Content">
+    <p:spTree>
+      <p:nvGrpSpPr>
+        <p:cNvPr id="1" name=""/>
+        <p:cNvGrpSpPr/>
+        <p:nvPr/>
+      </p:nvGrpSpPr>
+      <p:grpSpPr>
+        <a:xfrm>
+          <a:off x="0" y="0"/>
+          <a:ext cx="0" cy="0"/>
+          <a:chOff x="0" y="0"/>
+          <a:chExt cx="0" cy="0"/>
+        </a:xfrm>
+      </p:grpSpPr>
+      <p:sp>
+        <p:nvSpPr>
+          <p:cNvPr id="75" name="PlaceHolder 1"/>
+          <p:cNvSpPr>
+            <a:spLocks noGrp="1"/>
+          </p:cNvSpPr>
+          <p:nvPr>
+            <p:ph type="title"/>
+          </p:nvPr>
+        </p:nvSpPr>
+        <p:spPr>
+          <a:xfrm>
+            <a:off x="504000" y="74160"/>
+            <a:ext cx="9071280" cy="1250280"/>
+          </a:xfrm>
+          <a:prstGeom prst="rect">
+            <a:avLst/>
+          </a:prstGeom>
+          <a:noFill/>
+          <a:ln w="0">
+            <a:noFill/>
+          </a:ln>
+        </p:spPr>
+        <p:txBody>
+          <a:bodyPr lIns="0" rIns="0" tIns="0" bIns="0" anchor="ctr">
+            <a:noAutofit/>
+          </a:bodyPr>
+          <a:p>
+            <a:pPr indent="0" algn="ctr">
+              <a:buNone/>
+            </a:pPr>
+            <a:endParaRPr b="0" lang="ru-RU" sz="4400" spc="-1" strike="noStrike">
+              <a:solidFill>
+                <a:srgbClr val="000000"/>
+              </a:solidFill>
+              <a:latin typeface="Arial"/>
+            </a:endParaRPr>
+          </a:p>
+        </p:txBody>
+      </p:sp>
+      <p:sp>
+        <p:nvSpPr>
+          <p:cNvPr id="76" name="PlaceHolder 2"/>
+          <p:cNvSpPr>
+            <a:spLocks noGrp="1"/>
+          </p:cNvSpPr>
+          <p:nvPr>
+            <p:ph/>
+          </p:nvPr>
+        </p:nvSpPr>
+        <p:spPr>
+          <a:xfrm>
+            <a:off x="504000" y="1326600"/>
+            <a:ext cx="2920680" cy="1568160"/>
+          </a:xfrm>
+          <a:prstGeom prst="rect">
+            <a:avLst/>
+          </a:prstGeom>
+          <a:noFill/>
+          <a:ln w="0">
+            <a:noFill/>
+          </a:ln>
+        </p:spPr>
+        <p:txBody>
+          <a:bodyPr lIns="0" rIns="0" tIns="0" bIns="0" anchor="t">
+            <a:normAutofit fontScale="82000"/>
+          </a:bodyPr>
+          <a:p>
+            <a:pPr indent="0">
+              <a:spcBef>
+                <a:spcPts val="1417"/>
+              </a:spcBef>
+              <a:buNone/>
+            </a:pPr>
+            <a:endParaRPr b="0" lang="ru-RU" sz="3200" spc="-1" strike="noStrike">
+              <a:solidFill>
+                <a:srgbClr val="000000"/>
+              </a:solidFill>
+              <a:latin typeface="Arial"/>
+            </a:endParaRPr>
+          </a:p>
+        </p:txBody>
+      </p:sp>
+      <p:sp>
+        <p:nvSpPr>
+          <p:cNvPr id="77" name="PlaceHolder 3"/>
+          <p:cNvSpPr>
+            <a:spLocks noGrp="1"/>
+          </p:cNvSpPr>
+          <p:nvPr>
+            <p:ph/>
+          </p:nvPr>
+        </p:nvSpPr>
+        <p:spPr>
+          <a:xfrm>
+            <a:off x="3571200" y="1326600"/>
+            <a:ext cx="2920680" cy="1568160"/>
+          </a:xfrm>
+          <a:prstGeom prst="rect">
+            <a:avLst/>
+          </a:prstGeom>
+          <a:noFill/>
+          <a:ln w="0">
+            <a:noFill/>
+          </a:ln>
+        </p:spPr>
+        <p:txBody>
+          <a:bodyPr lIns="0" rIns="0" tIns="0" bIns="0" anchor="t">
+            <a:normAutofit fontScale="82000"/>
+          </a:bodyPr>
+          <a:p>
+            <a:pPr indent="0">
+              <a:spcBef>
+                <a:spcPts val="1417"/>
+              </a:spcBef>
+              <a:buNone/>
+            </a:pPr>
+            <a:endParaRPr b="0" lang="ru-RU" sz="3200" spc="-1" strike="noStrike">
+              <a:solidFill>
+                <a:srgbClr val="000000"/>
+              </a:solidFill>
+              <a:latin typeface="Arial"/>
+            </a:endParaRPr>
+          </a:p>
+        </p:txBody>
+      </p:sp>
+      <p:sp>
+        <p:nvSpPr>
+          <p:cNvPr id="78" name="PlaceHolder 4"/>
+          <p:cNvSpPr>
+            <a:spLocks noGrp="1"/>
+          </p:cNvSpPr>
+          <p:nvPr>
+            <p:ph/>
+          </p:nvPr>
+        </p:nvSpPr>
+        <p:spPr>
+          <a:xfrm>
+            <a:off x="6638040" y="1326600"/>
+            <a:ext cx="2920680" cy="1568160"/>
+          </a:xfrm>
+          <a:prstGeom prst="rect">
+            <a:avLst/>
+          </a:prstGeom>
+          <a:noFill/>
+          <a:ln w="0">
+            <a:noFill/>
+          </a:ln>
+        </p:spPr>
+        <p:txBody>
+          <a:bodyPr lIns="0" rIns="0" tIns="0" bIns="0" anchor="t">
+            <a:normAutofit fontScale="82000"/>
+          </a:bodyPr>
+          <a:p>
+            <a:pPr indent="0">
+              <a:spcBef>
+                <a:spcPts val="1417"/>
+              </a:spcBef>
+              <a:buNone/>
+            </a:pPr>
+            <a:endParaRPr b="0" lang="ru-RU" sz="3200" spc="-1" strike="noStrike">
+              <a:solidFill>
+                <a:srgbClr val="000000"/>
+              </a:solidFill>
+              <a:latin typeface="Arial"/>
+            </a:endParaRPr>
+          </a:p>
+        </p:txBody>
+      </p:sp>
+      <p:sp>
+        <p:nvSpPr>
+          <p:cNvPr id="79" name="PlaceHolder 5"/>
+          <p:cNvSpPr>
+            <a:spLocks noGrp="1"/>
+          </p:cNvSpPr>
+          <p:nvPr>
+            <p:ph/>
+          </p:nvPr>
+        </p:nvSpPr>
+        <p:spPr>
+          <a:xfrm>
+            <a:off x="504000" y="3044160"/>
+            <a:ext cx="2920680" cy="1568160"/>
+          </a:xfrm>
+          <a:prstGeom prst="rect">
+            <a:avLst/>
+          </a:prstGeom>
+          <a:noFill/>
+          <a:ln w="0">
+            <a:noFill/>
+          </a:ln>
+        </p:spPr>
+        <p:txBody>
+          <a:bodyPr lIns="0" rIns="0" tIns="0" bIns="0" anchor="t">
+            <a:normAutofit fontScale="82000"/>
+          </a:bodyPr>
+          <a:p>
+            <a:pPr indent="0">
+              <a:spcBef>
+                <a:spcPts val="1417"/>
+              </a:spcBef>
+              <a:buNone/>
+            </a:pPr>
+            <a:endParaRPr b="0" lang="ru-RU" sz="3200" spc="-1" strike="noStrike">
+              <a:solidFill>
+                <a:srgbClr val="000000"/>
+              </a:solidFill>
+              <a:latin typeface="Arial"/>
+            </a:endParaRPr>
+          </a:p>
+        </p:txBody>
+      </p:sp>
+      <p:sp>
+        <p:nvSpPr>
+          <p:cNvPr id="80" name="PlaceHolder 6"/>
+          <p:cNvSpPr>
+            <a:spLocks noGrp="1"/>
+          </p:cNvSpPr>
+          <p:nvPr>
+            <p:ph/>
+          </p:nvPr>
+        </p:nvSpPr>
+        <p:spPr>
+          <a:xfrm>
+            <a:off x="3571200" y="3044160"/>
+            <a:ext cx="2920680" cy="1568160"/>
+          </a:xfrm>
+          <a:prstGeom prst="rect">
+            <a:avLst/>
+          </a:prstGeom>
+          <a:noFill/>
+          <a:ln w="0">
+            <a:noFill/>
+          </a:ln>
+        </p:spPr>
+        <p:txBody>
+          <a:bodyPr lIns="0" rIns="0" tIns="0" bIns="0" anchor="t">
+            <a:normAutofit fontScale="82000"/>
+          </a:bodyPr>
+          <a:p>
+            <a:pPr indent="0">
+              <a:spcBef>
+                <a:spcPts val="1417"/>
+              </a:spcBef>
+              <a:buNone/>
+            </a:pPr>
+            <a:endParaRPr b="0" lang="ru-RU" sz="3200" spc="-1" strike="noStrike">
+              <a:solidFill>
+                <a:srgbClr val="000000"/>
+              </a:solidFill>
+              <a:latin typeface="Arial"/>
+            </a:endParaRPr>
+          </a:p>
+        </p:txBody>
+      </p:sp>
+      <p:sp>
+        <p:nvSpPr>
+          <p:cNvPr id="81" name="PlaceHolder 7"/>
+          <p:cNvSpPr>
+            <a:spLocks noGrp="1"/>
+          </p:cNvSpPr>
+          <p:nvPr>
+            <p:ph/>
+          </p:nvPr>
+        </p:nvSpPr>
+        <p:spPr>
+          <a:xfrm>
+            <a:off x="6638040" y="3044160"/>
+            <a:ext cx="2920680" cy="1568160"/>
+          </a:xfrm>
+          <a:prstGeom prst="rect">
+            <a:avLst/>
+          </a:prstGeom>
+          <a:noFill/>
+          <a:ln w="0">
+            <a:noFill/>
+          </a:ln>
+        </p:spPr>
+        <p:txBody>
+          <a:bodyPr lIns="0" rIns="0" tIns="0" bIns="0" anchor="t">
+            <a:normAutofit fontScale="82000"/>
+          </a:bodyPr>
+          <a:p>
+            <a:pPr indent="0">
+              <a:spcBef>
+                <a:spcPts val="1417"/>
+              </a:spcBef>
+              <a:buNone/>
+            </a:pPr>
+            <a:endParaRPr b="0" lang="ru-RU" sz="3200" spc="-1" strike="noStrike">
+              <a:solidFill>
+                <a:srgbClr val="000000"/>
+              </a:solidFill>
+              <a:latin typeface="Arial"/>
+            </a:endParaRPr>
+          </a:p>
+        </p:txBody>
+      </p:sp>
+      <p:sp>
+        <p:nvSpPr>
+          <p:cNvPr id="9" name="PlaceHolder 8"/>
+          <p:cNvSpPr>
+            <a:spLocks noGrp="1"/>
+          </p:cNvSpPr>
+          <p:nvPr>
+            <p:ph type="ftr" idx="4"/>
+          </p:nvPr>
+        </p:nvSpPr>
+        <p:spPr/>
+        <p:txBody>
+          <a:bodyPr/>
+          <a:p>
+            <a:r>
+              <a:t>Footer</a:t>
+            </a:r>
+          </a:p>
+        </p:txBody>
+      </p:sp>
+      <p:sp>
+        <p:nvSpPr>
+          <p:cNvPr id="10" name="PlaceHolder 9"/>
+          <p:cNvSpPr>
+            <a:spLocks noGrp="1"/>
+          </p:cNvSpPr>
+          <p:nvPr>
+            <p:ph type="sldNum" idx="5"/>
+          </p:nvPr>
+        </p:nvSpPr>
+        <p:spPr/>
+        <p:txBody>
+          <a:bodyPr/>
+          <a:p>
+            <a:fld id="{485353FD-67C8-44D1-9DA8-A46175506CAF}" type="slidenum">
+              <a:t>&lt;#&gt;</a:t>
+            </a:fld>
+          </a:p>
+        </p:txBody>
+      </p:sp>
+      <p:sp>
+        <p:nvSpPr>
+          <p:cNvPr id="11" name="PlaceHolder 10"/>
+          <p:cNvSpPr>
+            <a:spLocks noGrp="1"/>
+          </p:cNvSpPr>
+          <p:nvPr>
+            <p:ph type="dt" idx="6"/>
           </p:nvPr>
         </p:nvSpPr>
         <p:spPr/>
@@ -1177,7 +3684,7 @@
         <p:spPr>
           <a:xfrm>
             <a:off x="504000" y="74160"/>
-            <a:ext cx="9071640" cy="1250280"/>
+            <a:ext cx="9071280" cy="1250280"/>
           </a:xfrm>
           <a:prstGeom prst="rect">
             <a:avLst/>
@@ -1217,7 +3724,7 @@
         <p:spPr>
           <a:xfrm>
             <a:off x="504000" y="1326600"/>
-            <a:ext cx="9071640" cy="3288240"/>
+            <a:ext cx="9071280" cy="3287880"/>
           </a:xfrm>
           <a:prstGeom prst="rect">
             <a:avLst/>
@@ -1254,7 +3761,7 @@
             <a:spLocks noGrp="1"/>
           </p:cNvSpPr>
           <p:nvPr>
-            <p:ph type="ftr" idx="2"/>
+            <p:ph type="ftr" idx="1"/>
           </p:nvPr>
         </p:nvSpPr>
         <p:spPr/>
@@ -1274,14 +3781,14 @@
             <a:spLocks noGrp="1"/>
           </p:cNvSpPr>
           <p:nvPr>
-            <p:ph type="sldNum" idx="3"/>
+            <p:ph type="sldNum" idx="2"/>
           </p:nvPr>
         </p:nvSpPr>
         <p:spPr/>
         <p:txBody>
           <a:bodyPr/>
           <a:p>
-            <a:fld id="{EC03214B-44DF-40BF-8313-62B2D04D617C}" type="slidenum">
+            <a:fld id="{88964035-66B7-4A08-AF48-91F117D8EE1C}" type="slidenum">
               <a:t>&lt;#&gt;</a:t>
             </a:fld>
           </a:p>
@@ -1294,7 +3801,7 @@
             <a:spLocks noGrp="1"/>
           </p:cNvSpPr>
           <p:nvPr>
-            <p:ph type="dt" idx="1"/>
+            <p:ph type="dt" idx="3"/>
           </p:nvPr>
         </p:nvSpPr>
         <p:spPr/>
@@ -1343,7 +3850,7 @@
         <p:spPr>
           <a:xfrm>
             <a:off x="504000" y="74160"/>
-            <a:ext cx="9071640" cy="1250280"/>
+            <a:ext cx="9071280" cy="1250280"/>
           </a:xfrm>
           <a:prstGeom prst="rect">
             <a:avLst/>
@@ -1383,7 +3890,7 @@
         <p:spPr>
           <a:xfrm>
             <a:off x="504000" y="1326600"/>
-            <a:ext cx="4426920" cy="3288240"/>
+            <a:ext cx="4426560" cy="3287880"/>
           </a:xfrm>
           <a:prstGeom prst="rect">
             <a:avLst/>
@@ -1425,8 +3932,8 @@
         </p:nvSpPr>
         <p:spPr>
           <a:xfrm>
-            <a:off x="5152680" y="1326600"/>
-            <a:ext cx="4426920" cy="3288240"/>
+            <a:off x="5152320" y="1326600"/>
+            <a:ext cx="4426560" cy="3287880"/>
           </a:xfrm>
           <a:prstGeom prst="rect">
             <a:avLst/>
@@ -1463,7 +3970,7 @@
             <a:spLocks noGrp="1"/>
           </p:cNvSpPr>
           <p:nvPr>
-            <p:ph type="ftr" idx="2"/>
+            <p:ph type="ftr" idx="1"/>
           </p:nvPr>
         </p:nvSpPr>
         <p:spPr/>
@@ -1483,14 +3990,14 @@
             <a:spLocks noGrp="1"/>
           </p:cNvSpPr>
           <p:nvPr>
-            <p:ph type="sldNum" idx="3"/>
+            <p:ph type="sldNum" idx="2"/>
           </p:nvPr>
         </p:nvSpPr>
         <p:spPr/>
         <p:txBody>
           <a:bodyPr/>
           <a:p>
-            <a:fld id="{2B6AC481-2B1E-4FD9-8739-24458D38272A}" type="slidenum">
+            <a:fld id="{5EE56171-0424-492F-A14F-51BD1222A519}" type="slidenum">
               <a:t>&lt;#&gt;</a:t>
             </a:fld>
           </a:p>
@@ -1503,7 +4010,7 @@
             <a:spLocks noGrp="1"/>
           </p:cNvSpPr>
           <p:nvPr>
-            <p:ph type="dt" idx="1"/>
+            <p:ph type="dt" idx="3"/>
           </p:nvPr>
         </p:nvSpPr>
         <p:spPr/>
@@ -1552,7 +4059,7 @@
         <p:spPr>
           <a:xfrm>
             <a:off x="504000" y="74160"/>
-            <a:ext cx="9071640" cy="1250280"/>
+            <a:ext cx="9071280" cy="1250280"/>
           </a:xfrm>
           <a:prstGeom prst="rect">
             <a:avLst/>
@@ -1586,7 +4093,7 @@
             <a:spLocks noGrp="1"/>
           </p:cNvSpPr>
           <p:nvPr>
-            <p:ph type="ftr" idx="2"/>
+            <p:ph type="ftr" idx="1"/>
           </p:nvPr>
         </p:nvSpPr>
         <p:spPr/>
@@ -1606,14 +4113,14 @@
             <a:spLocks noGrp="1"/>
           </p:cNvSpPr>
           <p:nvPr>
-            <p:ph type="sldNum" idx="3"/>
+            <p:ph type="sldNum" idx="2"/>
           </p:nvPr>
         </p:nvSpPr>
         <p:spPr/>
         <p:txBody>
           <a:bodyPr/>
           <a:p>
-            <a:fld id="{A454B69A-C1EE-47D5-BCA0-7531F78C2738}" type="slidenum">
+            <a:fld id="{18ECB7E1-427B-4643-8F08-18E931B131EC}" type="slidenum">
               <a:t>&lt;#&gt;</a:t>
             </a:fld>
           </a:p>
@@ -1626,7 +4133,7 @@
             <a:spLocks noGrp="1"/>
           </p:cNvSpPr>
           <p:nvPr>
-            <p:ph type="dt" idx="1"/>
+            <p:ph type="dt" idx="3"/>
           </p:nvPr>
         </p:nvSpPr>
         <p:spPr/>
@@ -1674,8 +4181,8 @@
         </p:nvSpPr>
         <p:spPr>
           <a:xfrm>
-            <a:off x="504000" y="226080"/>
-            <a:ext cx="9071640" cy="4388400"/>
+            <a:off x="504000" y="74160"/>
+            <a:ext cx="9071280" cy="5795280"/>
           </a:xfrm>
           <a:prstGeom prst="rect">
             <a:avLst/>
@@ -1707,7 +4214,7 @@
             <a:spLocks noGrp="1"/>
           </p:cNvSpPr>
           <p:nvPr>
-            <p:ph type="ftr" idx="2"/>
+            <p:ph type="ftr" idx="1"/>
           </p:nvPr>
         </p:nvSpPr>
         <p:spPr/>
@@ -1727,14 +4234,14 @@
             <a:spLocks noGrp="1"/>
           </p:cNvSpPr>
           <p:nvPr>
-            <p:ph type="sldNum" idx="3"/>
+            <p:ph type="sldNum" idx="2"/>
           </p:nvPr>
         </p:nvSpPr>
         <p:spPr/>
         <p:txBody>
           <a:bodyPr/>
           <a:p>
-            <a:fld id="{E92004CF-BFE8-46DE-A9A2-26FD88437203}" type="slidenum">
+            <a:fld id="{0FC2286A-56BE-48D5-B623-97AB1D18819B}" type="slidenum">
               <a:t>&lt;#&gt;</a:t>
             </a:fld>
           </a:p>
@@ -1747,7 +4254,7 @@
             <a:spLocks noGrp="1"/>
           </p:cNvSpPr>
           <p:nvPr>
-            <p:ph type="dt" idx="1"/>
+            <p:ph type="dt" idx="3"/>
           </p:nvPr>
         </p:nvSpPr>
         <p:spPr/>
@@ -1796,7 +4303,7 @@
         <p:spPr>
           <a:xfrm>
             <a:off x="504000" y="74160"/>
-            <a:ext cx="9071640" cy="1250280"/>
+            <a:ext cx="9071280" cy="1250280"/>
           </a:xfrm>
           <a:prstGeom prst="rect">
             <a:avLst/>
@@ -1836,7 +4343,7 @@
         <p:spPr>
           <a:xfrm>
             <a:off x="504000" y="1326600"/>
-            <a:ext cx="4426920" cy="1568160"/>
+            <a:ext cx="4426560" cy="1568160"/>
           </a:xfrm>
           <a:prstGeom prst="rect">
             <a:avLst/>
@@ -1878,8 +4385,8 @@
         </p:nvSpPr>
         <p:spPr>
           <a:xfrm>
-            <a:off x="5152680" y="1326600"/>
-            <a:ext cx="4426920" cy="3288240"/>
+            <a:off x="5152320" y="1326600"/>
+            <a:ext cx="4426560" cy="3287880"/>
           </a:xfrm>
           <a:prstGeom prst="rect">
             <a:avLst/>
@@ -1922,7 +4429,7 @@
         <p:spPr>
           <a:xfrm>
             <a:off x="504000" y="3044160"/>
-            <a:ext cx="4426920" cy="1568160"/>
+            <a:ext cx="4426560" cy="1568160"/>
           </a:xfrm>
           <a:prstGeom prst="rect">
             <a:avLst/>
@@ -1959,7 +4466,7 @@
             <a:spLocks noGrp="1"/>
           </p:cNvSpPr>
           <p:nvPr>
-            <p:ph type="ftr" idx="2"/>
+            <p:ph type="ftr" idx="1"/>
           </p:nvPr>
         </p:nvSpPr>
         <p:spPr/>
@@ -1979,14 +4486,14 @@
             <a:spLocks noGrp="1"/>
           </p:cNvSpPr>
           <p:nvPr>
-            <p:ph type="sldNum" idx="3"/>
+            <p:ph type="sldNum" idx="2"/>
           </p:nvPr>
         </p:nvSpPr>
         <p:spPr/>
         <p:txBody>
           <a:bodyPr/>
           <a:p>
-            <a:fld id="{8EEB393A-C77F-48DD-9D77-276CDF180B19}" type="slidenum">
+            <a:fld id="{C0E2A2FC-8A2B-4216-8AE1-F7DC4320BE72}" type="slidenum">
               <a:t>&lt;#&gt;</a:t>
             </a:fld>
           </a:p>
@@ -1999,7 +4506,7 @@
             <a:spLocks noGrp="1"/>
           </p:cNvSpPr>
           <p:nvPr>
-            <p:ph type="dt" idx="1"/>
+            <p:ph type="dt" idx="3"/>
           </p:nvPr>
         </p:nvSpPr>
         <p:spPr/>
@@ -2048,7 +4555,7 @@
         <p:spPr>
           <a:xfrm>
             <a:off x="504000" y="74160"/>
-            <a:ext cx="9071640" cy="1250280"/>
+            <a:ext cx="9071280" cy="1250280"/>
           </a:xfrm>
           <a:prstGeom prst="rect">
             <a:avLst/>
@@ -2088,7 +4595,7 @@
         <p:spPr>
           <a:xfrm>
             <a:off x="504000" y="1326600"/>
-            <a:ext cx="4426920" cy="3288240"/>
+            <a:ext cx="4426560" cy="3287880"/>
           </a:xfrm>
           <a:prstGeom prst="rect">
             <a:avLst/>
@@ -2130,8 +4637,8 @@
         </p:nvSpPr>
         <p:spPr>
           <a:xfrm>
-            <a:off x="5152680" y="1326600"/>
-            <a:ext cx="4426920" cy="1568160"/>
+            <a:off x="5152320" y="1326600"/>
+            <a:ext cx="4426560" cy="1568160"/>
           </a:xfrm>
           <a:prstGeom prst="rect">
             <a:avLst/>
@@ -2173,8 +4680,8 @@
         </p:nvSpPr>
         <p:spPr>
           <a:xfrm>
-            <a:off x="5152680" y="3044160"/>
-            <a:ext cx="4426920" cy="1568160"/>
+            <a:off x="5152320" y="3044160"/>
+            <a:ext cx="4426560" cy="1568160"/>
           </a:xfrm>
           <a:prstGeom prst="rect">
             <a:avLst/>
@@ -2211,7 +4718,7 @@
             <a:spLocks noGrp="1"/>
           </p:cNvSpPr>
           <p:nvPr>
-            <p:ph type="ftr" idx="2"/>
+            <p:ph type="ftr" idx="1"/>
           </p:nvPr>
         </p:nvSpPr>
         <p:spPr/>
@@ -2231,14 +4738,14 @@
             <a:spLocks noGrp="1"/>
           </p:cNvSpPr>
           <p:nvPr>
-            <p:ph type="sldNum" idx="3"/>
+            <p:ph type="sldNum" idx="2"/>
           </p:nvPr>
         </p:nvSpPr>
         <p:spPr/>
         <p:txBody>
           <a:bodyPr/>
           <a:p>
-            <a:fld id="{0A3665B2-AD1F-4737-B376-2C85C5D7D82F}" type="slidenum">
+            <a:fld id="{DE49D356-10C8-451F-B071-7275F9FFE51B}" type="slidenum">
               <a:t>&lt;#&gt;</a:t>
             </a:fld>
           </a:p>
@@ -2251,7 +4758,7 @@
             <a:spLocks noGrp="1"/>
           </p:cNvSpPr>
           <p:nvPr>
-            <p:ph type="dt" idx="1"/>
+            <p:ph type="dt" idx="3"/>
           </p:nvPr>
         </p:nvSpPr>
         <p:spPr/>
@@ -2300,7 +4807,7 @@
         <p:spPr>
           <a:xfrm>
             <a:off x="504000" y="74160"/>
-            <a:ext cx="9071640" cy="1250280"/>
+            <a:ext cx="9071280" cy="1250280"/>
           </a:xfrm>
           <a:prstGeom prst="rect">
             <a:avLst/>
@@ -2340,7 +4847,7 @@
         <p:spPr>
           <a:xfrm>
             <a:off x="504000" y="1326600"/>
-            <a:ext cx="4426920" cy="1568160"/>
+            <a:ext cx="4426560" cy="1568160"/>
           </a:xfrm>
           <a:prstGeom prst="rect">
             <a:avLst/>
@@ -2382,8 +4889,8 @@
         </p:nvSpPr>
         <p:spPr>
           <a:xfrm>
-            <a:off x="5152680" y="1326600"/>
-            <a:ext cx="4426920" cy="1568160"/>
+            <a:off x="5152320" y="1326600"/>
+            <a:ext cx="4426560" cy="1568160"/>
           </a:xfrm>
           <a:prstGeom prst="rect">
             <a:avLst/>
@@ -2426,7 +4933,7 @@
         <p:spPr>
           <a:xfrm>
             <a:off x="504000" y="3044160"/>
-            <a:ext cx="9071640" cy="1568160"/>
+            <a:ext cx="9071280" cy="1568160"/>
           </a:xfrm>
           <a:prstGeom prst="rect">
             <a:avLst/>
@@ -2463,7 +4970,7 @@
             <a:spLocks noGrp="1"/>
           </p:cNvSpPr>
           <p:nvPr>
-            <p:ph type="ftr" idx="2"/>
+            <p:ph type="ftr" idx="1"/>
           </p:nvPr>
         </p:nvSpPr>
         <p:spPr/>
@@ -2483,14 +4990,14 @@
             <a:spLocks noGrp="1"/>
           </p:cNvSpPr>
           <p:nvPr>
-            <p:ph type="sldNum" idx="3"/>
+            <p:ph type="sldNum" idx="2"/>
           </p:nvPr>
         </p:nvSpPr>
         <p:spPr/>
         <p:txBody>
           <a:bodyPr/>
           <a:p>
-            <a:fld id="{810B2044-1BA5-4022-BBFB-A598E48B10B7}" type="slidenum">
+            <a:fld id="{B26801EA-D288-4BA3-8340-0D44E1252783}" type="slidenum">
               <a:t>&lt;#&gt;</a:t>
             </a:fld>
           </a:p>
@@ -2503,7 +5010,7 @@
             <a:spLocks noGrp="1"/>
           </p:cNvSpPr>
           <p:nvPr>
-            <p:ph type="dt" idx="1"/>
+            <p:ph type="dt" idx="3"/>
           </p:nvPr>
         </p:nvSpPr>
         <p:spPr/>
@@ -2551,8 +5058,8 @@
         </p:nvSpPr>
         <p:spPr>
           <a:xfrm>
-            <a:off x="504000" y="226080"/>
-            <a:ext cx="9071640" cy="946440"/>
+            <a:off x="504000" y="74160"/>
+            <a:ext cx="9071280" cy="1249920"/>
           </a:xfrm>
           <a:prstGeom prst="rect">
             <a:avLst/>
@@ -2567,11 +5074,11 @@
             <a:noAutofit/>
           </a:bodyPr>
           <a:p>
-            <a:pPr indent="0" algn="ctr">
-              <a:buNone/>
-            </a:pPr>
-            <a:r>
-              <a:rPr b="0" lang="ru-RU" sz="4400" spc="-1" strike="noStrike">
+            <a:pPr indent="0">
+              <a:buNone/>
+            </a:pPr>
+            <a:r>
+              <a:rPr b="0" lang="ru-RU" sz="1800" spc="-1" strike="noStrike">
                 <a:solidFill>
                   <a:srgbClr val="000000"/>
                 </a:solidFill>
@@ -2579,7 +5086,7 @@
               </a:rPr>
               <a:t>Для правки текста заглавия щёлкните мышью</a:t>
             </a:r>
-            <a:endParaRPr b="0" lang="ru-RU" sz="4400" spc="-1" strike="noStrike">
+            <a:endParaRPr b="0" lang="ru-RU" sz="1800" spc="-1" strike="noStrike">
               <a:solidFill>
                 <a:srgbClr val="000000"/>
               </a:solidFill>
@@ -2595,238 +5102,13 @@
             <a:spLocks noGrp="1"/>
           </p:cNvSpPr>
           <p:nvPr>
-            <p:ph type="body"/>
-          </p:nvPr>
-        </p:nvSpPr>
-        <p:spPr>
-          <a:xfrm>
-            <a:off x="504000" y="1326600"/>
-            <a:ext cx="9071640" cy="3288240"/>
-          </a:xfrm>
-          <a:prstGeom prst="rect">
-            <a:avLst/>
-          </a:prstGeom>
-          <a:noFill/>
-          <a:ln w="0">
-            <a:noFill/>
-          </a:ln>
-        </p:spPr>
-        <p:txBody>
-          <a:bodyPr lIns="0" rIns="0" tIns="0" bIns="0" anchor="t">
-            <a:normAutofit/>
-          </a:bodyPr>
-          <a:p>
-            <a:pPr marL="432000" indent="-324000">
-              <a:spcBef>
-                <a:spcPts val="1417"/>
-              </a:spcBef>
-              <a:buClr>
-                <a:srgbClr val="000000"/>
-              </a:buClr>
-              <a:buSzPct val="45000"/>
-              <a:buFont typeface="Wingdings" charset="2"/>
-              <a:buChar char=""/>
-            </a:pPr>
-            <a:r>
-              <a:rPr b="0" lang="ru-RU" sz="3200" spc="-1" strike="noStrike">
-                <a:solidFill>
-                  <a:srgbClr val="000000"/>
-                </a:solidFill>
-                <a:latin typeface="Arial"/>
-              </a:rPr>
-              <a:t>Для правки структуры щёлкните мышью</a:t>
-            </a:r>
-            <a:endParaRPr b="0" lang="ru-RU" sz="3200" spc="-1" strike="noStrike">
-              <a:solidFill>
-                <a:srgbClr val="000000"/>
-              </a:solidFill>
-              <a:latin typeface="Arial"/>
-            </a:endParaRPr>
-          </a:p>
-          <a:p>
-            <a:pPr lvl="1" marL="864000" indent="-324000">
-              <a:spcBef>
-                <a:spcPts val="1134"/>
-              </a:spcBef>
-              <a:buClr>
-                <a:srgbClr val="000000"/>
-              </a:buClr>
-              <a:buSzPct val="75000"/>
-              <a:buFont typeface="Symbol" charset="2"/>
-              <a:buChar char=""/>
-            </a:pPr>
-            <a:r>
-              <a:rPr b="0" lang="ru-RU" sz="2800" spc="-1" strike="noStrike">
-                <a:solidFill>
-                  <a:srgbClr val="000000"/>
-                </a:solidFill>
-                <a:latin typeface="Arial"/>
-              </a:rPr>
-              <a:t>Второй уровень структуры</a:t>
-            </a:r>
-            <a:endParaRPr b="0" lang="ru-RU" sz="2800" spc="-1" strike="noStrike">
-              <a:solidFill>
-                <a:srgbClr val="000000"/>
-              </a:solidFill>
-              <a:latin typeface="Arial"/>
-            </a:endParaRPr>
-          </a:p>
-          <a:p>
-            <a:pPr lvl="2" marL="1296000" indent="-288000">
-              <a:spcBef>
-                <a:spcPts val="850"/>
-              </a:spcBef>
-              <a:buClr>
-                <a:srgbClr val="000000"/>
-              </a:buClr>
-              <a:buSzPct val="45000"/>
-              <a:buFont typeface="Wingdings" charset="2"/>
-              <a:buChar char=""/>
-            </a:pPr>
-            <a:r>
-              <a:rPr b="0" lang="ru-RU" sz="2400" spc="-1" strike="noStrike">
-                <a:solidFill>
-                  <a:srgbClr val="000000"/>
-                </a:solidFill>
-                <a:latin typeface="Arial"/>
-              </a:rPr>
-              <a:t>Третий уровень структуры</a:t>
-            </a:r>
-            <a:endParaRPr b="0" lang="ru-RU" sz="2400" spc="-1" strike="noStrike">
-              <a:solidFill>
-                <a:srgbClr val="000000"/>
-              </a:solidFill>
-              <a:latin typeface="Arial"/>
-            </a:endParaRPr>
-          </a:p>
-          <a:p>
-            <a:pPr lvl="3" marL="1728000" indent="-216000">
-              <a:spcBef>
-                <a:spcPts val="567"/>
-              </a:spcBef>
-              <a:buClr>
-                <a:srgbClr val="000000"/>
-              </a:buClr>
-              <a:buSzPct val="75000"/>
-              <a:buFont typeface="Symbol" charset="2"/>
-              <a:buChar char=""/>
-            </a:pPr>
-            <a:r>
-              <a:rPr b="0" lang="ru-RU" sz="2000" spc="-1" strike="noStrike">
-                <a:solidFill>
-                  <a:srgbClr val="000000"/>
-                </a:solidFill>
-                <a:latin typeface="Arial"/>
-              </a:rPr>
-              <a:t>Четвёртый уровень структуры</a:t>
-            </a:r>
-            <a:endParaRPr b="0" lang="ru-RU" sz="2000" spc="-1" strike="noStrike">
-              <a:solidFill>
-                <a:srgbClr val="000000"/>
-              </a:solidFill>
-              <a:latin typeface="Arial"/>
-            </a:endParaRPr>
-          </a:p>
-          <a:p>
-            <a:pPr lvl="4" marL="2160000" indent="-216000">
-              <a:spcBef>
-                <a:spcPts val="283"/>
-              </a:spcBef>
-              <a:buClr>
-                <a:srgbClr val="000000"/>
-              </a:buClr>
-              <a:buSzPct val="45000"/>
-              <a:buFont typeface="Wingdings" charset="2"/>
-              <a:buChar char=""/>
-            </a:pPr>
-            <a:r>
-              <a:rPr b="0" lang="ru-RU" sz="2000" spc="-1" strike="noStrike">
-                <a:solidFill>
-                  <a:srgbClr val="000000"/>
-                </a:solidFill>
-                <a:latin typeface="Arial"/>
-              </a:rPr>
-              <a:t>Пятый уровень структуры</a:t>
-            </a:r>
-            <a:endParaRPr b="0" lang="ru-RU" sz="2000" spc="-1" strike="noStrike">
-              <a:solidFill>
-                <a:srgbClr val="000000"/>
-              </a:solidFill>
-              <a:latin typeface="Arial"/>
-            </a:endParaRPr>
-          </a:p>
-          <a:p>
-            <a:pPr lvl="5" marL="2592000" indent="-216000">
-              <a:spcBef>
-                <a:spcPts val="283"/>
-              </a:spcBef>
-              <a:buClr>
-                <a:srgbClr val="000000"/>
-              </a:buClr>
-              <a:buSzPct val="45000"/>
-              <a:buFont typeface="Wingdings" charset="2"/>
-              <a:buChar char=""/>
-            </a:pPr>
-            <a:r>
-              <a:rPr b="0" lang="ru-RU" sz="2000" spc="-1" strike="noStrike">
-                <a:solidFill>
-                  <a:srgbClr val="000000"/>
-                </a:solidFill>
-                <a:latin typeface="Arial"/>
-              </a:rPr>
-              <a:t>Шестой уровень структуры</a:t>
-            </a:r>
-            <a:endParaRPr b="0" lang="ru-RU" sz="2000" spc="-1" strike="noStrike">
-              <a:solidFill>
-                <a:srgbClr val="000000"/>
-              </a:solidFill>
-              <a:latin typeface="Arial"/>
-            </a:endParaRPr>
-          </a:p>
-          <a:p>
-            <a:pPr lvl="6" marL="3024000" indent="-216000">
-              <a:spcBef>
-                <a:spcPts val="283"/>
-              </a:spcBef>
-              <a:buClr>
-                <a:srgbClr val="000000"/>
-              </a:buClr>
-              <a:buSzPct val="45000"/>
-              <a:buFont typeface="Wingdings" charset="2"/>
-              <a:buChar char=""/>
-            </a:pPr>
-            <a:r>
-              <a:rPr b="0" lang="ru-RU" sz="2000" spc="-1" strike="noStrike">
-                <a:solidFill>
-                  <a:srgbClr val="000000"/>
-                </a:solidFill>
-                <a:latin typeface="Arial"/>
-              </a:rPr>
-              <a:t>Седьмой уровень структуры</a:t>
-            </a:r>
-            <a:endParaRPr b="0" lang="ru-RU" sz="2000" spc="-1" strike="noStrike">
-              <a:solidFill>
-                <a:srgbClr val="000000"/>
-              </a:solidFill>
-              <a:latin typeface="Arial"/>
-            </a:endParaRPr>
-          </a:p>
-        </p:txBody>
-      </p:sp>
-      <p:sp>
-        <p:nvSpPr>
-          <p:cNvPr id="2" name="PlaceHolder 3"/>
-          <p:cNvSpPr>
-            <a:spLocks noGrp="1"/>
-          </p:cNvSpPr>
-          <p:nvPr>
-            <p:ph type="dt" idx="1"/>
-          </p:nvPr>
-        </p:nvSpPr>
-        <p:spPr>
-          <a:xfrm>
-            <a:off x="504000" y="5165280"/>
-            <a:ext cx="2348280" cy="390600"/>
+            <p:ph type="ftr" idx="1"/>
+          </p:nvPr>
+        </p:nvSpPr>
+        <p:spPr>
+          <a:xfrm>
+            <a:off x="3447360" y="5165280"/>
+            <a:ext cx="3194640" cy="390240"/>
           </a:xfrm>
           <a:prstGeom prst="rect">
             <a:avLst/>
@@ -2841,8 +5123,14 @@
             <a:noAutofit/>
           </a:bodyPr>
           <a:lstStyle>
-            <a:lvl1pPr indent="0">
-              <a:buNone/>
+            <a:lvl1pPr indent="0" algn="ctr">
+              <a:lnSpc>
+                <a:spcPct val="100000"/>
+              </a:lnSpc>
+              <a:buNone/>
+              <a:tabLst>
+                <a:tab algn="l" pos="0"/>
+              </a:tabLst>
               <a:defRPr b="0" lang="ru-RU" sz="1400" spc="-1" strike="noStrike">
                 <a:solidFill>
                   <a:srgbClr val="000000"/>
@@ -2852,8 +5140,14 @@
             </a:lvl1pPr>
           </a:lstStyle>
           <a:p>
-            <a:pPr indent="0">
-              <a:buNone/>
+            <a:pPr indent="0" algn="ctr">
+              <a:lnSpc>
+                <a:spcPct val="100000"/>
+              </a:lnSpc>
+              <a:buNone/>
+              <a:tabLst>
+                <a:tab algn="l" pos="0"/>
+              </a:tabLst>
             </a:pPr>
             <a:r>
               <a:rPr b="0" lang="ru-RU" sz="1400" spc="-1" strike="noStrike">
@@ -2862,7 +5156,7 @@
                 </a:solidFill>
                 <a:latin typeface="Times New Roman"/>
               </a:rPr>
-              <a:t>&lt;дата/время&gt;</a:t>
+              <a:t>&lt;нижний колонтитул&gt;</a:t>
             </a:r>
             <a:endParaRPr b="0" lang="ru-RU" sz="1400" spc="-1" strike="noStrike">
               <a:solidFill>
@@ -2875,18 +5169,18 @@
       </p:sp>
       <p:sp>
         <p:nvSpPr>
-          <p:cNvPr id="3" name="PlaceHolder 4"/>
-          <p:cNvSpPr>
-            <a:spLocks noGrp="1"/>
-          </p:cNvSpPr>
-          <p:nvPr>
-            <p:ph type="ftr" idx="2"/>
-          </p:nvPr>
-        </p:nvSpPr>
-        <p:spPr>
-          <a:xfrm>
-            <a:off x="3447360" y="5165280"/>
-            <a:ext cx="3195000" cy="390600"/>
+          <p:cNvPr id="2" name="PlaceHolder 3"/>
+          <p:cNvSpPr>
+            <a:spLocks noGrp="1"/>
+          </p:cNvSpPr>
+          <p:nvPr>
+            <p:ph type="sldNum" idx="2"/>
+          </p:nvPr>
+        </p:nvSpPr>
+        <p:spPr>
+          <a:xfrm>
+            <a:off x="7227360" y="5165280"/>
+            <a:ext cx="2347920" cy="390240"/>
           </a:xfrm>
           <a:prstGeom prst="rect">
             <a:avLst/>
@@ -2901,8 +5195,14 @@
             <a:noAutofit/>
           </a:bodyPr>
           <a:lstStyle>
-            <a:lvl1pPr indent="0" algn="ctr">
-              <a:buNone/>
+            <a:lvl1pPr indent="0" algn="r">
+              <a:lnSpc>
+                <a:spcPct val="100000"/>
+              </a:lnSpc>
+              <a:buNone/>
+              <a:tabLst>
+                <a:tab algn="l" pos="0"/>
+              </a:tabLst>
               <a:defRPr b="0" lang="ru-RU" sz="1400" spc="-1" strike="noStrike">
                 <a:solidFill>
                   <a:srgbClr val="000000"/>
@@ -2912,70 +5212,16 @@
             </a:lvl1pPr>
           </a:lstStyle>
           <a:p>
-            <a:pPr indent="0" algn="ctr">
-              <a:buNone/>
-            </a:pPr>
-            <a:r>
-              <a:rPr b="0" lang="ru-RU" sz="1400" spc="-1" strike="noStrike">
-                <a:solidFill>
-                  <a:srgbClr val="000000"/>
-                </a:solidFill>
-                <a:latin typeface="Times New Roman"/>
-              </a:rPr>
-              <a:t>&lt;нижний колонтитул&gt;</a:t>
-            </a:r>
-            <a:endParaRPr b="0" lang="ru-RU" sz="1400" spc="-1" strike="noStrike">
-              <a:solidFill>
-                <a:srgbClr val="000000"/>
-              </a:solidFill>
-              <a:latin typeface="Times New Roman"/>
-            </a:endParaRPr>
-          </a:p>
-        </p:txBody>
-      </p:sp>
-      <p:sp>
-        <p:nvSpPr>
-          <p:cNvPr id="4" name="PlaceHolder 5"/>
-          <p:cNvSpPr>
-            <a:spLocks noGrp="1"/>
-          </p:cNvSpPr>
-          <p:nvPr>
-            <p:ph type="sldNum" idx="3"/>
-          </p:nvPr>
-        </p:nvSpPr>
-        <p:spPr>
-          <a:xfrm>
-            <a:off x="7227360" y="5165280"/>
-            <a:ext cx="2348280" cy="390600"/>
-          </a:xfrm>
-          <a:prstGeom prst="rect">
-            <a:avLst/>
-          </a:prstGeom>
-          <a:noFill/>
-          <a:ln w="0">
-            <a:noFill/>
-          </a:ln>
-        </p:spPr>
-        <p:txBody>
-          <a:bodyPr lIns="0" rIns="0" tIns="0" bIns="0" anchor="t">
-            <a:noAutofit/>
-          </a:bodyPr>
-          <a:lstStyle>
-            <a:lvl1pPr indent="0" algn="r">
-              <a:buNone/>
-              <a:defRPr b="0" lang="ru-RU" sz="1400" spc="-1" strike="noStrike">
-                <a:solidFill>
-                  <a:srgbClr val="000000"/>
-                </a:solidFill>
-                <a:latin typeface="Times New Roman"/>
-              </a:defRPr>
-            </a:lvl1pPr>
-          </a:lstStyle>
-          <a:p>
             <a:pPr indent="0" algn="r">
-              <a:buNone/>
-            </a:pPr>
-            <a:fld id="{E45A0AD6-29CE-4762-A354-84A979ACD255}" type="slidenum">
+              <a:lnSpc>
+                <a:spcPct val="100000"/>
+              </a:lnSpc>
+              <a:buNone/>
+              <a:tabLst>
+                <a:tab algn="l" pos="0"/>
+              </a:tabLst>
+            </a:pPr>
+            <a:fld id="{1C6302AF-A950-48D8-8897-20D699165F4B}" type="slidenum">
               <a:rPr b="0" lang="ru-RU" sz="1400" spc="-1" strike="noStrike">
                 <a:solidFill>
                   <a:srgbClr val="000000"/>
@@ -2989,6 +5235,291 @@
                 <a:srgbClr val="000000"/>
               </a:solidFill>
               <a:latin typeface="Times New Roman"/>
+            </a:endParaRPr>
+          </a:p>
+        </p:txBody>
+      </p:sp>
+      <p:sp>
+        <p:nvSpPr>
+          <p:cNvPr id="3" name="PlaceHolder 4"/>
+          <p:cNvSpPr>
+            <a:spLocks noGrp="1"/>
+          </p:cNvSpPr>
+          <p:nvPr>
+            <p:ph type="dt" idx="3"/>
+          </p:nvPr>
+        </p:nvSpPr>
+        <p:spPr>
+          <a:xfrm>
+            <a:off x="504000" y="5165280"/>
+            <a:ext cx="2347920" cy="390240"/>
+          </a:xfrm>
+          <a:prstGeom prst="rect">
+            <a:avLst/>
+          </a:prstGeom>
+          <a:noFill/>
+          <a:ln w="0">
+            <a:noFill/>
+          </a:ln>
+        </p:spPr>
+        <p:txBody>
+          <a:bodyPr lIns="0" rIns="0" tIns="0" bIns="0" anchor="t">
+            <a:noAutofit/>
+          </a:bodyPr>
+          <a:lstStyle>
+            <a:lvl1pPr indent="0">
+              <a:buNone/>
+              <a:defRPr b="0" lang="ru-RU" sz="1400" spc="-1" strike="noStrike">
+                <a:solidFill>
+                  <a:srgbClr val="000000"/>
+                </a:solidFill>
+                <a:latin typeface="Times New Roman"/>
+              </a:defRPr>
+            </a:lvl1pPr>
+          </a:lstStyle>
+          <a:p>
+            <a:pPr indent="0">
+              <a:buNone/>
+            </a:pPr>
+            <a:r>
+              <a:rPr b="0" lang="ru-RU" sz="1400" spc="-1" strike="noStrike">
+                <a:solidFill>
+                  <a:srgbClr val="000000"/>
+                </a:solidFill>
+                <a:latin typeface="Times New Roman"/>
+              </a:rPr>
+              <a:t>&lt;дата/время&gt;</a:t>
+            </a:r>
+            <a:endParaRPr b="0" lang="ru-RU" sz="1400" spc="-1" strike="noStrike">
+              <a:solidFill>
+                <a:srgbClr val="000000"/>
+              </a:solidFill>
+              <a:latin typeface="Times New Roman"/>
+            </a:endParaRPr>
+          </a:p>
+        </p:txBody>
+      </p:sp>
+      <p:sp>
+        <p:nvSpPr>
+          <p:cNvPr id="4" name="PlaceHolder 5"/>
+          <p:cNvSpPr>
+            <a:spLocks noGrp="1"/>
+          </p:cNvSpPr>
+          <p:nvPr>
+            <p:ph type="body"/>
+          </p:nvPr>
+        </p:nvSpPr>
+        <p:spPr>
+          <a:xfrm>
+            <a:off x="504000" y="1326600"/>
+            <a:ext cx="9072000" cy="3288600"/>
+          </a:xfrm>
+          <a:prstGeom prst="rect">
+            <a:avLst/>
+          </a:prstGeom>
+          <a:noFill/>
+          <a:ln w="0">
+            <a:noFill/>
+          </a:ln>
+        </p:spPr>
+        <p:txBody>
+          <a:bodyPr lIns="0" rIns="0" tIns="0" bIns="0" anchor="t">
+            <a:normAutofit/>
+          </a:bodyPr>
+          <a:p>
+            <a:pPr marL="432000" indent="-324000">
+              <a:spcBef>
+                <a:spcPts val="1417"/>
+              </a:spcBef>
+              <a:buClr>
+                <a:srgbClr val="000000"/>
+              </a:buClr>
+              <a:buSzPct val="45000"/>
+              <a:buFont typeface="Wingdings" charset="2"/>
+              <a:buChar char=""/>
+            </a:pPr>
+            <a:r>
+              <a:rPr b="0" lang="ru-RU" sz="3200" spc="-1" strike="noStrike">
+                <a:solidFill>
+                  <a:srgbClr val="000000"/>
+                </a:solidFill>
+                <a:latin typeface="Arial"/>
+              </a:rPr>
+              <a:t>Для правки структуры щёлкните мышью</a:t>
+            </a:r>
+            <a:endParaRPr b="0" lang="ru-RU" sz="3200" spc="-1" strike="noStrike">
+              <a:solidFill>
+                <a:srgbClr val="000000"/>
+              </a:solidFill>
+              <a:latin typeface="Arial"/>
+            </a:endParaRPr>
+          </a:p>
+          <a:p>
+            <a:pPr lvl="1" marL="864000" indent="-324000">
+              <a:spcBef>
+                <a:spcPts val="1134"/>
+              </a:spcBef>
+              <a:buClr>
+                <a:srgbClr val="000000"/>
+              </a:buClr>
+              <a:buSzPct val="75000"/>
+              <a:buFont typeface="Symbol" charset="2"/>
+              <a:buChar char=""/>
+            </a:pPr>
+            <a:r>
+              <a:rPr b="0" lang="ru-RU" sz="2800" spc="-1" strike="noStrike">
+                <a:solidFill>
+                  <a:srgbClr val="000000"/>
+                </a:solidFill>
+                <a:latin typeface="Arial"/>
+              </a:rPr>
+              <a:t>Второй уровень структуры</a:t>
+            </a:r>
+            <a:endParaRPr b="0" lang="ru-RU" sz="2800" spc="-1" strike="noStrike">
+              <a:solidFill>
+                <a:srgbClr val="000000"/>
+              </a:solidFill>
+              <a:latin typeface="Arial"/>
+            </a:endParaRPr>
+          </a:p>
+          <a:p>
+            <a:pPr lvl="2" marL="1296000" indent="-288000">
+              <a:spcBef>
+                <a:spcPts val="850"/>
+              </a:spcBef>
+              <a:buClr>
+                <a:srgbClr val="000000"/>
+              </a:buClr>
+              <a:buSzPct val="45000"/>
+              <a:buFont typeface="Wingdings" charset="2"/>
+              <a:buChar char=""/>
+            </a:pPr>
+            <a:r>
+              <a:rPr b="0" lang="ru-RU" sz="2400" spc="-1" strike="noStrike">
+                <a:solidFill>
+                  <a:srgbClr val="000000"/>
+                </a:solidFill>
+                <a:latin typeface="Arial"/>
+              </a:rPr>
+              <a:t>Третий уровень структуры</a:t>
+            </a:r>
+            <a:endParaRPr b="0" lang="ru-RU" sz="2400" spc="-1" strike="noStrike">
+              <a:solidFill>
+                <a:srgbClr val="000000"/>
+              </a:solidFill>
+              <a:latin typeface="Arial"/>
+            </a:endParaRPr>
+          </a:p>
+          <a:p>
+            <a:pPr lvl="3" marL="1728000" indent="-216000">
+              <a:spcBef>
+                <a:spcPts val="567"/>
+              </a:spcBef>
+              <a:buClr>
+                <a:srgbClr val="000000"/>
+              </a:buClr>
+              <a:buSzPct val="75000"/>
+              <a:buFont typeface="Symbol" charset="2"/>
+              <a:buChar char=""/>
+            </a:pPr>
+            <a:r>
+              <a:rPr b="0" lang="ru-RU" sz="2000" spc="-1" strike="noStrike">
+                <a:solidFill>
+                  <a:srgbClr val="000000"/>
+                </a:solidFill>
+                <a:latin typeface="Arial"/>
+              </a:rPr>
+              <a:t>Четвёртый уровень структуры</a:t>
+            </a:r>
+            <a:endParaRPr b="0" lang="ru-RU" sz="2000" spc="-1" strike="noStrike">
+              <a:solidFill>
+                <a:srgbClr val="000000"/>
+              </a:solidFill>
+              <a:latin typeface="Arial"/>
+            </a:endParaRPr>
+          </a:p>
+          <a:p>
+            <a:pPr lvl="4" marL="2160000" indent="-216000">
+              <a:spcBef>
+                <a:spcPts val="283"/>
+              </a:spcBef>
+              <a:buClr>
+                <a:srgbClr val="000000"/>
+              </a:buClr>
+              <a:buSzPct val="45000"/>
+              <a:buFont typeface="Wingdings" charset="2"/>
+              <a:buChar char=""/>
+            </a:pPr>
+            <a:r>
+              <a:rPr b="0" lang="ru-RU" sz="2000" spc="-1" strike="noStrike">
+                <a:solidFill>
+                  <a:srgbClr val="000000"/>
+                </a:solidFill>
+                <a:latin typeface="Arial"/>
+              </a:rPr>
+              <a:t>Пятый уровень структуры</a:t>
+            </a:r>
+            <a:endParaRPr b="0" lang="ru-RU" sz="2000" spc="-1" strike="noStrike">
+              <a:solidFill>
+                <a:srgbClr val="000000"/>
+              </a:solidFill>
+              <a:latin typeface="Arial"/>
+            </a:endParaRPr>
+          </a:p>
+          <a:p>
+            <a:pPr lvl="5" marL="2592000" indent="-216000">
+              <a:spcBef>
+                <a:spcPts val="283"/>
+              </a:spcBef>
+              <a:buClr>
+                <a:srgbClr val="000000"/>
+              </a:buClr>
+              <a:buSzPct val="45000"/>
+              <a:buFont typeface="Wingdings" charset="2"/>
+              <a:buChar char=""/>
+            </a:pPr>
+            <a:r>
+              <a:rPr b="0" lang="ru-RU" sz="2000" spc="-1" strike="noStrike">
+                <a:solidFill>
+                  <a:srgbClr val="000000"/>
+                </a:solidFill>
+                <a:latin typeface="Arial"/>
+              </a:rPr>
+              <a:t>Шестой уровень структуры</a:t>
+            </a:r>
+            <a:endParaRPr b="0" lang="ru-RU" sz="2000" spc="-1" strike="noStrike">
+              <a:solidFill>
+                <a:srgbClr val="000000"/>
+              </a:solidFill>
+              <a:latin typeface="Arial"/>
+            </a:endParaRPr>
+          </a:p>
+          <a:p>
+            <a:pPr lvl="6" marL="3024000" indent="-216000">
+              <a:spcBef>
+                <a:spcPts val="283"/>
+              </a:spcBef>
+              <a:buClr>
+                <a:srgbClr val="000000"/>
+              </a:buClr>
+              <a:buSzPct val="45000"/>
+              <a:buFont typeface="Wingdings" charset="2"/>
+              <a:buChar char=""/>
+            </a:pPr>
+            <a:r>
+              <a:rPr b="0" lang="ru-RU" sz="2000" spc="-1" strike="noStrike">
+                <a:solidFill>
+                  <a:srgbClr val="000000"/>
+                </a:solidFill>
+                <a:latin typeface="Arial"/>
+              </a:rPr>
+              <a:t>Седьмой уровень структуры</a:t>
+            </a:r>
+            <a:endParaRPr b="0" lang="ru-RU" sz="2000" spc="-1" strike="noStrike">
+              <a:solidFill>
+                <a:srgbClr val="000000"/>
+              </a:solidFill>
+              <a:latin typeface="Arial"/>
             </a:endParaRPr>
           </a:p>
         </p:txBody>
@@ -3009,6 +5540,521 @@
     <p:sldLayoutId id="2147483658" r:id="rId11"/>
     <p:sldLayoutId id="2147483659" r:id="rId12"/>
     <p:sldLayoutId id="2147483660" r:id="rId13"/>
+  </p:sldLayoutIdLst>
+</p:sldMaster>
+</file>
+
+<file path=ppt/slideMasters/slideMaster2.xml><?xml version="1.0" encoding="utf-8"?>
+<p:sldMaster xmlns:a="http://schemas.openxmlformats.org/drawingml/2006/main" xmlns:p="http://schemas.openxmlformats.org/presentationml/2006/main" xmlns:r="http://schemas.openxmlformats.org/officeDocument/2006/relationships" xmlns:p14="http://schemas.microsoft.com/office/powerpoint/2010/main" xmlns:p15="http://schemas.microsoft.com/office/powerpoint/2012/main" xmlns:mc="http://schemas.openxmlformats.org/markup-compatibility/2006">
+  <p:cSld>
+    <p:spTree>
+      <p:nvGrpSpPr>
+        <p:cNvPr id="1" name=""/>
+        <p:cNvGrpSpPr/>
+        <p:nvPr/>
+      </p:nvGrpSpPr>
+      <p:grpSpPr>
+        <a:xfrm>
+          <a:off x="0" y="0"/>
+          <a:ext cx="0" cy="0"/>
+          <a:chOff x="0" y="0"/>
+          <a:chExt cx="0" cy="0"/>
+        </a:xfrm>
+      </p:grpSpPr>
+      <p:sp>
+        <p:nvSpPr>
+          <p:cNvPr id="41" name="PlaceHolder 1"/>
+          <p:cNvSpPr>
+            <a:spLocks noGrp="1"/>
+          </p:cNvSpPr>
+          <p:nvPr>
+            <p:ph type="title"/>
+          </p:nvPr>
+        </p:nvSpPr>
+        <p:spPr>
+          <a:xfrm>
+            <a:off x="504000" y="74160"/>
+            <a:ext cx="9071280" cy="1249920"/>
+          </a:xfrm>
+          <a:prstGeom prst="rect">
+            <a:avLst/>
+          </a:prstGeom>
+          <a:noFill/>
+          <a:ln w="0">
+            <a:noFill/>
+          </a:ln>
+        </p:spPr>
+        <p:txBody>
+          <a:bodyPr lIns="0" rIns="0" tIns="0" bIns="0" anchor="ctr">
+            <a:noAutofit/>
+          </a:bodyPr>
+          <a:p>
+            <a:pPr indent="0">
+              <a:buNone/>
+            </a:pPr>
+            <a:r>
+              <a:rPr b="0" lang="ru-RU" sz="1800" spc="-1" strike="noStrike">
+                <a:solidFill>
+                  <a:srgbClr val="000000"/>
+                </a:solidFill>
+                <a:latin typeface="Arial"/>
+              </a:rPr>
+              <a:t>Для правки текста заглавия щёлкните мышью</a:t>
+            </a:r>
+            <a:endParaRPr b="0" lang="ru-RU" sz="1800" spc="-1" strike="noStrike">
+              <a:solidFill>
+                <a:srgbClr val="000000"/>
+              </a:solidFill>
+              <a:latin typeface="Arial"/>
+            </a:endParaRPr>
+          </a:p>
+        </p:txBody>
+      </p:sp>
+      <p:sp>
+        <p:nvSpPr>
+          <p:cNvPr id="42" name="PlaceHolder 2"/>
+          <p:cNvSpPr>
+            <a:spLocks noGrp="1"/>
+          </p:cNvSpPr>
+          <p:nvPr>
+            <p:ph type="body"/>
+          </p:nvPr>
+        </p:nvSpPr>
+        <p:spPr>
+          <a:xfrm>
+            <a:off x="504000" y="1326600"/>
+            <a:ext cx="9071280" cy="3287880"/>
+          </a:xfrm>
+          <a:prstGeom prst="rect">
+            <a:avLst/>
+          </a:prstGeom>
+          <a:noFill/>
+          <a:ln w="0">
+            <a:noFill/>
+          </a:ln>
+        </p:spPr>
+        <p:txBody>
+          <a:bodyPr lIns="0" rIns="0" tIns="0" bIns="0" anchor="t">
+            <a:normAutofit/>
+          </a:bodyPr>
+          <a:p>
+            <a:pPr marL="432000" indent="-324000">
+              <a:spcBef>
+                <a:spcPts val="1417"/>
+              </a:spcBef>
+              <a:buClr>
+                <a:srgbClr val="000000"/>
+              </a:buClr>
+              <a:buSzPct val="45000"/>
+              <a:buFont typeface="Wingdings" charset="2"/>
+              <a:buChar char=""/>
+            </a:pPr>
+            <a:r>
+              <a:rPr b="0" lang="ru-RU" sz="1800" spc="-1" strike="noStrike">
+                <a:solidFill>
+                  <a:srgbClr val="000000"/>
+                </a:solidFill>
+                <a:latin typeface="Arial"/>
+              </a:rPr>
+              <a:t>Для правки структуры щёлкните мышью</a:t>
+            </a:r>
+            <a:endParaRPr b="0" lang="ru-RU" sz="1800" spc="-1" strike="noStrike">
+              <a:solidFill>
+                <a:srgbClr val="000000"/>
+              </a:solidFill>
+              <a:latin typeface="Arial"/>
+            </a:endParaRPr>
+          </a:p>
+          <a:p>
+            <a:pPr lvl="1" marL="864000" indent="-324000">
+              <a:spcBef>
+                <a:spcPts val="1134"/>
+              </a:spcBef>
+              <a:buClr>
+                <a:srgbClr val="000000"/>
+              </a:buClr>
+              <a:buSzPct val="75000"/>
+              <a:buFont typeface="Symbol" charset="2"/>
+              <a:buChar char=""/>
+            </a:pPr>
+            <a:r>
+              <a:rPr b="0" lang="ru-RU" sz="1800" spc="-1" strike="noStrike">
+                <a:solidFill>
+                  <a:srgbClr val="000000"/>
+                </a:solidFill>
+                <a:latin typeface="Arial"/>
+              </a:rPr>
+              <a:t>Второй уровень структуры</a:t>
+            </a:r>
+            <a:endParaRPr b="0" lang="ru-RU" sz="1800" spc="-1" strike="noStrike">
+              <a:solidFill>
+                <a:srgbClr val="000000"/>
+              </a:solidFill>
+              <a:latin typeface="Arial"/>
+            </a:endParaRPr>
+          </a:p>
+          <a:p>
+            <a:pPr lvl="2" marL="1296000" indent="-288000">
+              <a:spcBef>
+                <a:spcPts val="850"/>
+              </a:spcBef>
+              <a:buClr>
+                <a:srgbClr val="000000"/>
+              </a:buClr>
+              <a:buSzPct val="45000"/>
+              <a:buFont typeface="Wingdings" charset="2"/>
+              <a:buChar char=""/>
+            </a:pPr>
+            <a:r>
+              <a:rPr b="0" lang="ru-RU" sz="1800" spc="-1" strike="noStrike">
+                <a:solidFill>
+                  <a:srgbClr val="000000"/>
+                </a:solidFill>
+                <a:latin typeface="Arial"/>
+              </a:rPr>
+              <a:t>Третий уровень структуры</a:t>
+            </a:r>
+            <a:endParaRPr b="0" lang="ru-RU" sz="1800" spc="-1" strike="noStrike">
+              <a:solidFill>
+                <a:srgbClr val="000000"/>
+              </a:solidFill>
+              <a:latin typeface="Arial"/>
+            </a:endParaRPr>
+          </a:p>
+          <a:p>
+            <a:pPr lvl="3" marL="1728000" indent="-216000">
+              <a:spcBef>
+                <a:spcPts val="567"/>
+              </a:spcBef>
+              <a:buClr>
+                <a:srgbClr val="000000"/>
+              </a:buClr>
+              <a:buSzPct val="75000"/>
+              <a:buFont typeface="Symbol" charset="2"/>
+              <a:buChar char=""/>
+            </a:pPr>
+            <a:r>
+              <a:rPr b="0" lang="ru-RU" sz="1800" spc="-1" strike="noStrike">
+                <a:solidFill>
+                  <a:srgbClr val="000000"/>
+                </a:solidFill>
+                <a:latin typeface="Arial"/>
+              </a:rPr>
+              <a:t>Четвёртый уровень структуры</a:t>
+            </a:r>
+            <a:endParaRPr b="0" lang="ru-RU" sz="1800" spc="-1" strike="noStrike">
+              <a:solidFill>
+                <a:srgbClr val="000000"/>
+              </a:solidFill>
+              <a:latin typeface="Arial"/>
+            </a:endParaRPr>
+          </a:p>
+          <a:p>
+            <a:pPr lvl="4" marL="2160000" indent="-216000">
+              <a:spcBef>
+                <a:spcPts val="283"/>
+              </a:spcBef>
+              <a:buClr>
+                <a:srgbClr val="000000"/>
+              </a:buClr>
+              <a:buSzPct val="45000"/>
+              <a:buFont typeface="Wingdings" charset="2"/>
+              <a:buChar char=""/>
+            </a:pPr>
+            <a:r>
+              <a:rPr b="0" lang="ru-RU" sz="1800" spc="-1" strike="noStrike">
+                <a:solidFill>
+                  <a:srgbClr val="000000"/>
+                </a:solidFill>
+                <a:latin typeface="Arial"/>
+              </a:rPr>
+              <a:t>Пятый уровень структуры</a:t>
+            </a:r>
+            <a:endParaRPr b="0" lang="ru-RU" sz="1800" spc="-1" strike="noStrike">
+              <a:solidFill>
+                <a:srgbClr val="000000"/>
+              </a:solidFill>
+              <a:latin typeface="Arial"/>
+            </a:endParaRPr>
+          </a:p>
+          <a:p>
+            <a:pPr lvl="5" marL="2592000" indent="-216000">
+              <a:spcBef>
+                <a:spcPts val="283"/>
+              </a:spcBef>
+              <a:buClr>
+                <a:srgbClr val="000000"/>
+              </a:buClr>
+              <a:buSzPct val="45000"/>
+              <a:buFont typeface="Wingdings" charset="2"/>
+              <a:buChar char=""/>
+            </a:pPr>
+            <a:r>
+              <a:rPr b="0" lang="ru-RU" sz="1800" spc="-1" strike="noStrike">
+                <a:solidFill>
+                  <a:srgbClr val="000000"/>
+                </a:solidFill>
+                <a:latin typeface="Arial"/>
+              </a:rPr>
+              <a:t>Шестой уровень структуры</a:t>
+            </a:r>
+            <a:endParaRPr b="0" lang="ru-RU" sz="1800" spc="-1" strike="noStrike">
+              <a:solidFill>
+                <a:srgbClr val="000000"/>
+              </a:solidFill>
+              <a:latin typeface="Arial"/>
+            </a:endParaRPr>
+          </a:p>
+          <a:p>
+            <a:pPr lvl="6" marL="3024000" indent="-216000">
+              <a:spcBef>
+                <a:spcPts val="283"/>
+              </a:spcBef>
+              <a:buClr>
+                <a:srgbClr val="000000"/>
+              </a:buClr>
+              <a:buSzPct val="45000"/>
+              <a:buFont typeface="Wingdings" charset="2"/>
+              <a:buChar char=""/>
+            </a:pPr>
+            <a:r>
+              <a:rPr b="0" lang="ru-RU" sz="1800" spc="-1" strike="noStrike">
+                <a:solidFill>
+                  <a:srgbClr val="000000"/>
+                </a:solidFill>
+                <a:latin typeface="Arial"/>
+              </a:rPr>
+              <a:t>Седьмой уровень структуры</a:t>
+            </a:r>
+            <a:endParaRPr b="0" lang="ru-RU" sz="1800" spc="-1" strike="noStrike">
+              <a:solidFill>
+                <a:srgbClr val="000000"/>
+              </a:solidFill>
+              <a:latin typeface="Arial"/>
+            </a:endParaRPr>
+          </a:p>
+        </p:txBody>
+      </p:sp>
+      <p:sp>
+        <p:nvSpPr>
+          <p:cNvPr id="43" name="PlaceHolder 3"/>
+          <p:cNvSpPr>
+            <a:spLocks noGrp="1"/>
+          </p:cNvSpPr>
+          <p:nvPr>
+            <p:ph type="ftr" idx="4"/>
+          </p:nvPr>
+        </p:nvSpPr>
+        <p:spPr>
+          <a:xfrm>
+            <a:off x="3447360" y="5165280"/>
+            <a:ext cx="3194640" cy="390240"/>
+          </a:xfrm>
+          <a:prstGeom prst="rect">
+            <a:avLst/>
+          </a:prstGeom>
+          <a:noFill/>
+          <a:ln w="0">
+            <a:noFill/>
+          </a:ln>
+        </p:spPr>
+        <p:txBody>
+          <a:bodyPr lIns="0" rIns="0" tIns="0" bIns="0" anchor="t">
+            <a:noAutofit/>
+          </a:bodyPr>
+          <a:lstStyle>
+            <a:lvl1pPr indent="0" algn="ctr">
+              <a:lnSpc>
+                <a:spcPct val="100000"/>
+              </a:lnSpc>
+              <a:buNone/>
+              <a:tabLst>
+                <a:tab algn="l" pos="0"/>
+              </a:tabLst>
+              <a:defRPr b="0" lang="ru-RU" sz="1400" spc="-1" strike="noStrike">
+                <a:solidFill>
+                  <a:srgbClr val="000000"/>
+                </a:solidFill>
+                <a:latin typeface="Times New Roman"/>
+              </a:defRPr>
+            </a:lvl1pPr>
+          </a:lstStyle>
+          <a:p>
+            <a:pPr indent="0" algn="ctr">
+              <a:lnSpc>
+                <a:spcPct val="100000"/>
+              </a:lnSpc>
+              <a:buNone/>
+              <a:tabLst>
+                <a:tab algn="l" pos="0"/>
+              </a:tabLst>
+            </a:pPr>
+            <a:r>
+              <a:rPr b="0" lang="ru-RU" sz="1400" spc="-1" strike="noStrike">
+                <a:solidFill>
+                  <a:srgbClr val="000000"/>
+                </a:solidFill>
+                <a:latin typeface="Times New Roman"/>
+              </a:rPr>
+              <a:t>&lt;нижний колонтитул&gt;</a:t>
+            </a:r>
+            <a:endParaRPr b="0" lang="ru-RU" sz="1400" spc="-1" strike="noStrike">
+              <a:solidFill>
+                <a:srgbClr val="000000"/>
+              </a:solidFill>
+              <a:latin typeface="Times New Roman"/>
+            </a:endParaRPr>
+          </a:p>
+        </p:txBody>
+      </p:sp>
+      <p:sp>
+        <p:nvSpPr>
+          <p:cNvPr id="44" name="PlaceHolder 4"/>
+          <p:cNvSpPr>
+            <a:spLocks noGrp="1"/>
+          </p:cNvSpPr>
+          <p:nvPr>
+            <p:ph type="sldNum" idx="5"/>
+          </p:nvPr>
+        </p:nvSpPr>
+        <p:spPr>
+          <a:xfrm>
+            <a:off x="7227360" y="5165280"/>
+            <a:ext cx="2347920" cy="390240"/>
+          </a:xfrm>
+          <a:prstGeom prst="rect">
+            <a:avLst/>
+          </a:prstGeom>
+          <a:noFill/>
+          <a:ln w="0">
+            <a:noFill/>
+          </a:ln>
+        </p:spPr>
+        <p:txBody>
+          <a:bodyPr lIns="0" rIns="0" tIns="0" bIns="0" anchor="t">
+            <a:noAutofit/>
+          </a:bodyPr>
+          <a:lstStyle>
+            <a:lvl1pPr indent="0" algn="r">
+              <a:lnSpc>
+                <a:spcPct val="100000"/>
+              </a:lnSpc>
+              <a:buNone/>
+              <a:tabLst>
+                <a:tab algn="l" pos="0"/>
+              </a:tabLst>
+              <a:defRPr b="0" lang="ru-RU" sz="1400" spc="-1" strike="noStrike">
+                <a:solidFill>
+                  <a:srgbClr val="000000"/>
+                </a:solidFill>
+                <a:latin typeface="Times New Roman"/>
+              </a:defRPr>
+            </a:lvl1pPr>
+          </a:lstStyle>
+          <a:p>
+            <a:pPr indent="0" algn="r">
+              <a:lnSpc>
+                <a:spcPct val="100000"/>
+              </a:lnSpc>
+              <a:buNone/>
+              <a:tabLst>
+                <a:tab algn="l" pos="0"/>
+              </a:tabLst>
+            </a:pPr>
+            <a:fld id="{F56995BF-E9D7-400A-ABBB-D1D8ECE40053}" type="slidenum">
+              <a:rPr b="0" lang="ru-RU" sz="1400" spc="-1" strike="noStrike">
+                <a:solidFill>
+                  <a:srgbClr val="000000"/>
+                </a:solidFill>
+                <a:latin typeface="Times New Roman"/>
+              </a:rPr>
+              <a:t>&lt;номер&gt;</a:t>
+            </a:fld>
+            <a:endParaRPr b="0" lang="ru-RU" sz="1400" spc="-1" strike="noStrike">
+              <a:solidFill>
+                <a:srgbClr val="000000"/>
+              </a:solidFill>
+              <a:latin typeface="Times New Roman"/>
+            </a:endParaRPr>
+          </a:p>
+        </p:txBody>
+      </p:sp>
+      <p:sp>
+        <p:nvSpPr>
+          <p:cNvPr id="45" name="PlaceHolder 5"/>
+          <p:cNvSpPr>
+            <a:spLocks noGrp="1"/>
+          </p:cNvSpPr>
+          <p:nvPr>
+            <p:ph type="dt" idx="6"/>
+          </p:nvPr>
+        </p:nvSpPr>
+        <p:spPr>
+          <a:xfrm>
+            <a:off x="504000" y="5165280"/>
+            <a:ext cx="2347920" cy="390240"/>
+          </a:xfrm>
+          <a:prstGeom prst="rect">
+            <a:avLst/>
+          </a:prstGeom>
+          <a:noFill/>
+          <a:ln w="0">
+            <a:noFill/>
+          </a:ln>
+        </p:spPr>
+        <p:txBody>
+          <a:bodyPr lIns="0" rIns="0" tIns="0" bIns="0" anchor="t">
+            <a:noAutofit/>
+          </a:bodyPr>
+          <a:lstStyle>
+            <a:lvl1pPr indent="0">
+              <a:buNone/>
+              <a:defRPr b="0" lang="ru-RU" sz="1400" spc="-1" strike="noStrike">
+                <a:solidFill>
+                  <a:srgbClr val="000000"/>
+                </a:solidFill>
+                <a:latin typeface="Times New Roman"/>
+              </a:defRPr>
+            </a:lvl1pPr>
+          </a:lstStyle>
+          <a:p>
+            <a:pPr indent="0">
+              <a:buNone/>
+            </a:pPr>
+            <a:r>
+              <a:rPr b="0" lang="ru-RU" sz="1400" spc="-1" strike="noStrike">
+                <a:solidFill>
+                  <a:srgbClr val="000000"/>
+                </a:solidFill>
+                <a:latin typeface="Times New Roman"/>
+              </a:rPr>
+              <a:t>&lt;дата/время&gt;</a:t>
+            </a:r>
+            <a:endParaRPr b="0" lang="ru-RU" sz="1400" spc="-1" strike="noStrike">
+              <a:solidFill>
+                <a:srgbClr val="000000"/>
+              </a:solidFill>
+              <a:latin typeface="Times New Roman"/>
+            </a:endParaRPr>
+          </a:p>
+        </p:txBody>
+      </p:sp>
+    </p:spTree>
+  </p:cSld>
+  <p:clrMap bg1="lt1" bg2="lt2" tx1="dk1" tx2="dk2" accent1="accent1" accent2="accent2" accent3="accent3" accent4="accent4" accent5="accent5" accent6="accent6" hlink="hlink" folHlink="folHlink"/>
+  <p:sldLayoutIdLst>
+    <p:sldLayoutId id="2147483662" r:id="rId2"/>
+    <p:sldLayoutId id="2147483663" r:id="rId3"/>
+    <p:sldLayoutId id="2147483664" r:id="rId4"/>
+    <p:sldLayoutId id="2147483665" r:id="rId5"/>
+    <p:sldLayoutId id="2147483666" r:id="rId6"/>
+    <p:sldLayoutId id="2147483667" r:id="rId7"/>
+    <p:sldLayoutId id="2147483668" r:id="rId8"/>
+    <p:sldLayoutId id="2147483669" r:id="rId9"/>
+    <p:sldLayoutId id="2147483670" r:id="rId10"/>
+    <p:sldLayoutId id="2147483671" r:id="rId11"/>
+    <p:sldLayoutId id="2147483672" r:id="rId12"/>
+    <p:sldLayoutId id="2147483673" r:id="rId13"/>
   </p:sldLayoutIdLst>
 </p:sldMaster>
 </file>
@@ -3032,7 +6078,7 @@
       </p:grpSpPr>
       <p:sp>
         <p:nvSpPr>
-          <p:cNvPr id="41" name="PlaceHolder 1"/>
+          <p:cNvPr id="82" name="PlaceHolder 1"/>
           <p:cNvSpPr>
             <a:spLocks noGrp="1"/>
           </p:cNvSpPr>
@@ -3042,8 +6088,8 @@
         </p:nvSpPr>
         <p:spPr>
           <a:xfrm>
-            <a:off x="491400" y="1767960"/>
-            <a:ext cx="9071640" cy="946440"/>
+            <a:off x="491400" y="3643560"/>
+            <a:ext cx="9071280" cy="946080"/>
           </a:xfrm>
           <a:prstGeom prst="rect">
             <a:avLst/>
@@ -3059,7 +6105,13 @@
           </a:bodyPr>
           <a:p>
             <a:pPr indent="0" algn="ctr">
-              <a:buNone/>
+              <a:lnSpc>
+                <a:spcPct val="100000"/>
+              </a:lnSpc>
+              <a:buNone/>
+              <a:tabLst>
+                <a:tab algn="l" pos="0"/>
+              </a:tabLst>
             </a:pPr>
             <a:r>
               <a:rPr b="0" lang="ru-RU" sz="4400" spc="-1" strike="noStrike">
@@ -3068,7 +6120,7 @@
                 </a:solidFill>
                 <a:latin typeface="Arial"/>
               </a:rPr>
-              <a:t>Проект Web</a:t>
+              <a:t>Проект Web-сервер c API</a:t>
             </a:r>
             <a:endParaRPr b="0" lang="ru-RU" sz="4400" spc="-1" strike="noStrike">
               <a:solidFill>
@@ -3081,7 +6133,7 @@
       </p:sp>
       <p:sp>
         <p:nvSpPr>
-          <p:cNvPr id="42" name="PlaceHolder 2"/>
+          <p:cNvPr id="83" name="PlaceHolder 2"/>
           <p:cNvSpPr>
             <a:spLocks noGrp="1"/>
           </p:cNvSpPr>
@@ -3091,8 +6143,8 @@
         </p:nvSpPr>
         <p:spPr>
           <a:xfrm>
-            <a:off x="491400" y="2028240"/>
-            <a:ext cx="9071640" cy="3288240"/>
+            <a:off x="491400" y="4164120"/>
+            <a:ext cx="9071280" cy="1337040"/>
           </a:xfrm>
           <a:prstGeom prst="rect">
             <a:avLst/>
@@ -3108,7 +6160,13 @@
           </a:bodyPr>
           <a:p>
             <a:pPr indent="0" algn="ctr">
-              <a:buNone/>
+              <a:lnSpc>
+                <a:spcPct val="100000"/>
+              </a:lnSpc>
+              <a:buNone/>
+              <a:tabLst>
+                <a:tab algn="l" pos="0"/>
+              </a:tabLst>
             </a:pPr>
             <a:r>
               <a:rPr b="0" lang="ru-RU" sz="1600" spc="-1" strike="noStrike">
@@ -3128,6 +6186,29 @@
           </a:p>
         </p:txBody>
       </p:sp>
+      <p:pic>
+        <p:nvPicPr>
+          <p:cNvPr id="84" name="" descr=""/>
+          <p:cNvPicPr/>
+          <p:nvPr/>
+        </p:nvPicPr>
+        <p:blipFill>
+          <a:blip r:embed="rId1"/>
+          <a:stretch/>
+        </p:blipFill>
+        <p:spPr>
+          <a:xfrm>
+            <a:off x="1459080" y="128520"/>
+            <a:ext cx="7314840" cy="3295440"/>
+          </a:xfrm>
+          <a:prstGeom prst="rect">
+            <a:avLst/>
+          </a:prstGeom>
+          <a:ln w="0">
+            <a:noFill/>
+          </a:ln>
+        </p:spPr>
+      </p:pic>
     </p:spTree>
   </p:cSld>
   <mc:AlternateContent>
@@ -3160,7 +6241,7 @@
       </p:grpSpPr>
       <p:sp>
         <p:nvSpPr>
-          <p:cNvPr id="43" name="PlaceHolder 1"/>
+          <p:cNvPr id="85" name="PlaceHolder 1"/>
           <p:cNvSpPr>
             <a:spLocks noGrp="1"/>
           </p:cNvSpPr>
@@ -3170,8 +6251,8 @@
         </p:nvSpPr>
         <p:spPr>
           <a:xfrm>
-            <a:off x="504000" y="226080"/>
-            <a:ext cx="9071640" cy="946440"/>
+            <a:off x="504000" y="0"/>
+            <a:ext cx="9071280" cy="946080"/>
           </a:xfrm>
           <a:prstGeom prst="rect">
             <a:avLst/>
@@ -3187,7 +6268,13 @@
           </a:bodyPr>
           <a:p>
             <a:pPr indent="0" algn="ctr">
-              <a:buNone/>
+              <a:lnSpc>
+                <a:spcPct val="100000"/>
+              </a:lnSpc>
+              <a:buNone/>
+              <a:tabLst>
+                <a:tab algn="l" pos="0"/>
+              </a:tabLst>
             </a:pPr>
             <a:r>
               <a:rPr b="0" lang="ru-RU" sz="3200" spc="-1" strike="noStrike">
@@ -3209,7 +6296,7 @@
       </p:sp>
       <p:sp>
         <p:nvSpPr>
-          <p:cNvPr id="44" name="PlaceHolder 2"/>
+          <p:cNvPr id="86" name="PlaceHolder 2"/>
           <p:cNvSpPr>
             <a:spLocks noGrp="1"/>
           </p:cNvSpPr>
@@ -3219,8 +6306,8 @@
         </p:nvSpPr>
         <p:spPr>
           <a:xfrm>
-            <a:off x="504000" y="850320"/>
-            <a:ext cx="9071640" cy="3288240"/>
+            <a:off x="504000" y="410400"/>
+            <a:ext cx="9071280" cy="3287880"/>
           </a:xfrm>
           <a:prstGeom prst="rect">
             <a:avLst/>
@@ -3236,7 +6323,13 @@
           </a:bodyPr>
           <a:p>
             <a:pPr indent="0">
-              <a:buNone/>
+              <a:lnSpc>
+                <a:spcPct val="100000"/>
+              </a:lnSpc>
+              <a:buNone/>
+              <a:tabLst>
+                <a:tab algn="l" pos="0"/>
+              </a:tabLst>
             </a:pPr>
             <a:r>
               <a:rPr b="0" lang="ru-RU" sz="2400" spc="-1" strike="noStrike">
@@ -3256,7 +6349,13 @@
           </a:p>
           <a:p>
             <a:pPr indent="0">
-              <a:buNone/>
+              <a:lnSpc>
+                <a:spcPct val="100000"/>
+              </a:lnSpc>
+              <a:buNone/>
+              <a:tabLst>
+                <a:tab algn="l" pos="0"/>
+              </a:tabLst>
             </a:pPr>
             <a:endParaRPr b="0" lang="ru-RU" sz="2400" spc="-1" strike="noStrike">
               <a:solidFill>
@@ -3267,7 +6366,13 @@
           </a:p>
           <a:p>
             <a:pPr indent="0">
-              <a:buNone/>
+              <a:lnSpc>
+                <a:spcPct val="100000"/>
+              </a:lnSpc>
+              <a:buNone/>
+              <a:tabLst>
+                <a:tab algn="l" pos="0"/>
+              </a:tabLst>
             </a:pPr>
             <a:r>
               <a:rPr b="0" lang="ru-RU" sz="2400" spc="-1" strike="noStrike">
@@ -3276,7 +6381,7 @@
                 </a:solidFill>
                 <a:latin typeface="Arial"/>
               </a:rPr>
-              <a:t>На сайте могут регистрироваться много пользователей, создавать несколько собственных маршрутов, добавляя желаемые для посещения места</a:t>
+              <a:t>На сайте могут регистрироваться много пользователей, создавать несколько собственных маршрутов, добавляя желаемые для посещения места в маршрут или в избранное</a:t>
             </a:r>
             <a:endParaRPr b="0" lang="ru-RU" sz="2400" spc="-1" strike="noStrike">
               <a:solidFill>
@@ -3287,6 +6392,29 @@
           </a:p>
         </p:txBody>
       </p:sp>
+      <p:pic>
+        <p:nvPicPr>
+          <p:cNvPr id="87" name="" descr=""/>
+          <p:cNvPicPr/>
+          <p:nvPr/>
+        </p:nvPicPr>
+        <p:blipFill>
+          <a:blip r:embed="rId1"/>
+          <a:stretch/>
+        </p:blipFill>
+        <p:spPr>
+          <a:xfrm>
+            <a:off x="3006000" y="3299760"/>
+            <a:ext cx="6667200" cy="2285640"/>
+          </a:xfrm>
+          <a:prstGeom prst="rect">
+            <a:avLst/>
+          </a:prstGeom>
+          <a:ln w="0">
+            <a:noFill/>
+          </a:ln>
+        </p:spPr>
+      </p:pic>
     </p:spTree>
   </p:cSld>
   <mc:AlternateContent>
@@ -3319,7 +6447,7 @@
       </p:grpSpPr>
       <p:sp>
         <p:nvSpPr>
-          <p:cNvPr id="45" name="PlaceHolder 1"/>
+          <p:cNvPr id="88" name="PlaceHolder 1"/>
           <p:cNvSpPr>
             <a:spLocks noGrp="1"/>
           </p:cNvSpPr>
@@ -3330,7 +6458,7 @@
         <p:spPr>
           <a:xfrm>
             <a:off x="504000" y="226080"/>
-            <a:ext cx="9071640" cy="946440"/>
+            <a:ext cx="9071280" cy="946080"/>
           </a:xfrm>
           <a:prstGeom prst="rect">
             <a:avLst/>
@@ -3346,7 +6474,13 @@
           </a:bodyPr>
           <a:p>
             <a:pPr indent="0" algn="ctr">
-              <a:buNone/>
+              <a:lnSpc>
+                <a:spcPct val="100000"/>
+              </a:lnSpc>
+              <a:buNone/>
+              <a:tabLst>
+                <a:tab algn="l" pos="0"/>
+              </a:tabLst>
             </a:pPr>
             <a:r>
               <a:rPr b="0" lang="ru-RU" sz="2800" spc="-1" strike="noStrike">
@@ -3368,7 +6502,7 @@
       </p:sp>
       <p:sp>
         <p:nvSpPr>
-          <p:cNvPr id="46" name="PlaceHolder 2"/>
+          <p:cNvPr id="89" name="PlaceHolder 2"/>
           <p:cNvSpPr>
             <a:spLocks noGrp="1"/>
           </p:cNvSpPr>
@@ -3379,7 +6513,7 @@
         <p:spPr>
           <a:xfrm>
             <a:off x="504000" y="1326600"/>
-            <a:ext cx="9158760" cy="3824280"/>
+            <a:ext cx="9158400" cy="3823920"/>
           </a:xfrm>
           <a:prstGeom prst="rect">
             <a:avLst/>
@@ -3395,7 +6529,13 @@
           </a:bodyPr>
           <a:p>
             <a:pPr indent="0">
-              <a:buNone/>
+              <a:lnSpc>
+                <a:spcPct val="100000"/>
+              </a:lnSpc>
+              <a:buNone/>
+              <a:tabLst>
+                <a:tab algn="l" pos="0"/>
+              </a:tabLst>
             </a:pPr>
             <a:r>
               <a:rPr b="0" lang="ru-RU" sz="2400" spc="-1" strike="noStrike">
@@ -3404,17 +6544,7 @@
                 </a:solidFill>
                 <a:latin typeface="Arial"/>
               </a:rPr>
-              <a:t>Для работы сайта необходимо запустить главный файл — main.py, а после перейти на </a:t>
-            </a:r>
-            <a:r>
-              <a:rPr b="0" lang="ru-RU" sz="2400" spc="-1" strike="noStrike">
-                <a:solidFill>
-                  <a:srgbClr val="000000"/>
-                </a:solidFill>
-                <a:latin typeface="Arial"/>
-                <a:hlinkClick r:id="rId1"/>
-              </a:rPr>
-              <a:t>http://127.0.0.1:8080</a:t>
+              <a:t>Сервер реализован через Replit на домене</a:t>
             </a:r>
             <a:endParaRPr b="0" lang="ru-RU" sz="2400" spc="-1" strike="noStrike">
               <a:solidFill>
@@ -3425,18 +6555,13 @@
           </a:p>
           <a:p>
             <a:pPr indent="0">
-              <a:buNone/>
-            </a:pPr>
-            <a:endParaRPr b="0" lang="ru-RU" sz="2400" spc="-1" strike="noStrike">
-              <a:solidFill>
-                <a:srgbClr val="000000"/>
-              </a:solidFill>
-              <a:latin typeface="Arial"/>
-            </a:endParaRPr>
-          </a:p>
-          <a:p>
-            <a:pPr indent="0">
-              <a:buNone/>
+              <a:lnSpc>
+                <a:spcPct val="100000"/>
+              </a:lnSpc>
+              <a:buNone/>
+              <a:tabLst>
+                <a:tab algn="l" pos="0"/>
+              </a:tabLst>
             </a:pPr>
             <a:r>
               <a:rPr b="0" lang="ru-RU" sz="2400" spc="-1" strike="noStrike">
@@ -3445,7 +6570,7 @@
                 </a:solidFill>
                 <a:latin typeface="Arial"/>
               </a:rPr>
-              <a:t>Перемещение по страницам происходит не при помощи поисковой строки, а кнопками сайта</a:t>
+              <a:t>https://web-project--grigoriybobkov.replit.app</a:t>
             </a:r>
             <a:endParaRPr b="0" lang="ru-RU" sz="2400" spc="-1" strike="noStrike">
               <a:solidFill>
@@ -3456,7 +6581,13 @@
           </a:p>
           <a:p>
             <a:pPr indent="0">
-              <a:buNone/>
+              <a:lnSpc>
+                <a:spcPct val="100000"/>
+              </a:lnSpc>
+              <a:buNone/>
+              <a:tabLst>
+                <a:tab algn="l" pos="0"/>
+              </a:tabLst>
             </a:pPr>
             <a:endParaRPr b="0" lang="ru-RU" sz="2400" spc="-1" strike="noStrike">
               <a:solidFill>
@@ -3467,7 +6598,13 @@
           </a:p>
           <a:p>
             <a:pPr indent="0">
-              <a:buNone/>
+              <a:lnSpc>
+                <a:spcPct val="100000"/>
+              </a:lnSpc>
+              <a:buNone/>
+              <a:tabLst>
+                <a:tab algn="l" pos="0"/>
+              </a:tabLst>
             </a:pPr>
             <a:r>
               <a:rPr b="0" lang="ru-RU" sz="2400" spc="-1" strike="noStrike">
@@ -3476,7 +6613,7 @@
                 </a:solidFill>
                 <a:latin typeface="Arial"/>
               </a:rPr>
-              <a:t>Файл Users.py обрабатывает и сохраняет данные пользователя</a:t>
+              <a:t>В проекте используется Static Api</a:t>
             </a:r>
             <a:endParaRPr b="0" lang="ru-RU" sz="2400" spc="-1" strike="noStrike">
               <a:solidFill>
@@ -3485,8 +6622,92 @@
               <a:latin typeface="Arial"/>
             </a:endParaRPr>
           </a:p>
-        </p:txBody>
-      </p:sp>
+          <a:p>
+            <a:pPr indent="0">
+              <a:lnSpc>
+                <a:spcPct val="100000"/>
+              </a:lnSpc>
+              <a:buNone/>
+              <a:tabLst>
+                <a:tab algn="l" pos="0"/>
+              </a:tabLst>
+            </a:pPr>
+            <a:r>
+              <a:rPr b="0" lang="ru-RU" sz="2400" spc="-1" strike="noStrike">
+                <a:solidFill>
+                  <a:srgbClr val="000000"/>
+                </a:solidFill>
+                <a:latin typeface="Arial"/>
+              </a:rPr>
+              <a:t>Яндекс.Карт и Геокодер Api</a:t>
+            </a:r>
+            <a:endParaRPr b="0" lang="ru-RU" sz="2400" spc="-1" strike="noStrike">
+              <a:solidFill>
+                <a:srgbClr val="000000"/>
+              </a:solidFill>
+              <a:latin typeface="Arial"/>
+            </a:endParaRPr>
+          </a:p>
+          <a:p>
+            <a:pPr indent="0">
+              <a:lnSpc>
+                <a:spcPct val="100000"/>
+              </a:lnSpc>
+              <a:buNone/>
+              <a:tabLst>
+                <a:tab algn="l" pos="0"/>
+              </a:tabLst>
+            </a:pPr>
+            <a:endParaRPr b="0" lang="ru-RU" sz="2400" spc="-1" strike="noStrike">
+              <a:solidFill>
+                <a:srgbClr val="000000"/>
+              </a:solidFill>
+              <a:latin typeface="Arial"/>
+            </a:endParaRPr>
+          </a:p>
+          <a:p>
+            <a:pPr indent="0">
+              <a:lnSpc>
+                <a:spcPct val="100000"/>
+              </a:lnSpc>
+              <a:buNone/>
+              <a:tabLst>
+                <a:tab algn="l" pos="0"/>
+              </a:tabLst>
+            </a:pPr>
+            <a:endParaRPr b="0" lang="ru-RU" sz="2400" spc="-1" strike="noStrike">
+              <a:solidFill>
+                <a:srgbClr val="000000"/>
+              </a:solidFill>
+              <a:latin typeface="Arial"/>
+            </a:endParaRPr>
+          </a:p>
+        </p:txBody>
+      </p:sp>
+      <p:pic>
+        <p:nvPicPr>
+          <p:cNvPr id="90" name="" descr=""/>
+          <p:cNvPicPr/>
+          <p:nvPr/>
+        </p:nvPicPr>
+        <p:blipFill>
+          <a:blip r:embed="rId1"/>
+          <a:srcRect l="9827" t="2134" r="7650" b="0"/>
+          <a:stretch/>
+        </p:blipFill>
+        <p:spPr>
+          <a:xfrm>
+            <a:off x="5275080" y="2299320"/>
+            <a:ext cx="4805280" cy="3297600"/>
+          </a:xfrm>
+          <a:prstGeom prst="rect">
+            <a:avLst/>
+          </a:prstGeom>
+          <a:ln w="0">
+            <a:noFill/>
+          </a:ln>
+        </p:spPr>
+      </p:pic>
     </p:spTree>
   </p:cSld>
   <mc:AlternateContent>
@@ -3519,7 +6740,7 @@
       </p:grpSpPr>
       <p:sp>
         <p:nvSpPr>
-          <p:cNvPr id="47" name="PlaceHolder 1"/>
+          <p:cNvPr id="91" name="PlaceHolder 1"/>
           <p:cNvSpPr>
             <a:spLocks noGrp="1"/>
           </p:cNvSpPr>
@@ -3530,7 +6751,7 @@
         <p:spPr>
           <a:xfrm>
             <a:off x="504000" y="226080"/>
-            <a:ext cx="9071640" cy="946440"/>
+            <a:ext cx="9071280" cy="946080"/>
           </a:xfrm>
           <a:prstGeom prst="rect">
             <a:avLst/>
@@ -3546,7 +6767,13 @@
           </a:bodyPr>
           <a:p>
             <a:pPr indent="0" algn="ctr">
-              <a:buNone/>
+              <a:lnSpc>
+                <a:spcPct val="100000"/>
+              </a:lnSpc>
+              <a:buNone/>
+              <a:tabLst>
+                <a:tab algn="l" pos="0"/>
+              </a:tabLst>
             </a:pPr>
             <a:r>
               <a:rPr b="0" lang="ru-RU" sz="2800" spc="-1" strike="noStrike">
@@ -3568,7 +6795,7 @@
       </p:sp>
       <p:sp>
         <p:nvSpPr>
-          <p:cNvPr id="48" name="PlaceHolder 2"/>
+          <p:cNvPr id="92" name="PlaceHolder 2"/>
           <p:cNvSpPr>
             <a:spLocks noGrp="1"/>
           </p:cNvSpPr>
@@ -3579,7 +6806,7 @@
         <p:spPr>
           <a:xfrm>
             <a:off x="504000" y="1326600"/>
-            <a:ext cx="9071640" cy="3288240"/>
+            <a:ext cx="9071280" cy="3287880"/>
           </a:xfrm>
           <a:prstGeom prst="rect">
             <a:avLst/>
@@ -3595,6 +6822,9 @@
           </a:bodyPr>
           <a:p>
             <a:pPr marL="432000" indent="-324000">
+              <a:lnSpc>
+                <a:spcPct val="100000"/>
+              </a:lnSpc>
               <a:spcBef>
                 <a:spcPts val="1417"/>
               </a:spcBef>
@@ -3623,6 +6853,9 @@
           </a:p>
           <a:p>
             <a:pPr marL="432000" indent="-324000">
+              <a:lnSpc>
+                <a:spcPct val="100000"/>
+              </a:lnSpc>
               <a:spcBef>
                 <a:spcPts val="1417"/>
               </a:spcBef>
@@ -3651,6 +6884,9 @@
           </a:p>
           <a:p>
             <a:pPr marL="432000" indent="-324000">
+              <a:lnSpc>
+                <a:spcPct val="100000"/>
+              </a:lnSpc>
               <a:spcBef>
                 <a:spcPts val="1417"/>
               </a:spcBef>
@@ -3668,7 +6904,7 @@
                 </a:solidFill>
                 <a:latin typeface="Arial"/>
               </a:rPr>
-              <a:t>Html шаблоны</a:t>
+              <a:t>Html шаблоны, вывод карт</a:t>
             </a:r>
             <a:endParaRPr b="0" lang="ru-RU" sz="2400" spc="-1" strike="noStrike">
               <a:solidFill>
@@ -3679,6 +6915,9 @@
           </a:p>
           <a:p>
             <a:pPr marL="432000" indent="-324000">
+              <a:lnSpc>
+                <a:spcPct val="100000"/>
+              </a:lnSpc>
               <a:spcBef>
                 <a:spcPts val="1417"/>
               </a:spcBef>
@@ -3696,7 +6935,7 @@
                 </a:solidFill>
                 <a:latin typeface="Arial"/>
               </a:rPr>
-              <a:t>CSS</a:t>
+              <a:t>Сторонний Аpi</a:t>
             </a:r>
             <a:endParaRPr b="0" lang="ru-RU" sz="2400" spc="-1" strike="noStrike">
               <a:solidFill>
@@ -3707,6 +6946,9 @@
           </a:p>
           <a:p>
             <a:pPr marL="432000" indent="-324000">
+              <a:lnSpc>
+                <a:spcPct val="100000"/>
+              </a:lnSpc>
               <a:spcBef>
                 <a:spcPts val="1417"/>
               </a:spcBef>
@@ -3724,7 +6966,7 @@
                 </a:solidFill>
                 <a:latin typeface="Arial"/>
               </a:rPr>
-              <a:t>ORM-модели</a:t>
+              <a:t>Хостинг через Replit</a:t>
             </a:r>
             <a:endParaRPr b="0" lang="ru-RU" sz="2400" spc="-1" strike="noStrike">
               <a:solidFill>
@@ -3767,7 +7009,7 @@
       </p:grpSpPr>
       <p:sp>
         <p:nvSpPr>
-          <p:cNvPr id="49" name="PlaceHolder 1"/>
+          <p:cNvPr id="93" name="PlaceHolder 1"/>
           <p:cNvSpPr>
             <a:spLocks noGrp="1"/>
           </p:cNvSpPr>
@@ -3777,8 +7019,8 @@
         </p:nvSpPr>
         <p:spPr>
           <a:xfrm>
-            <a:off x="504000" y="226080"/>
-            <a:ext cx="9071640" cy="946440"/>
+            <a:off x="504000" y="0"/>
+            <a:ext cx="9071280" cy="946080"/>
           </a:xfrm>
           <a:prstGeom prst="rect">
             <a:avLst/>
@@ -3794,7 +7036,13 @@
           </a:bodyPr>
           <a:p>
             <a:pPr indent="0" algn="ctr">
-              <a:buNone/>
+              <a:lnSpc>
+                <a:spcPct val="100000"/>
+              </a:lnSpc>
+              <a:buNone/>
+              <a:tabLst>
+                <a:tab algn="l" pos="0"/>
+              </a:tabLst>
             </a:pPr>
             <a:r>
               <a:rPr b="0" lang="ru-RU" sz="2800" spc="-1" strike="noStrike">
@@ -3816,7 +7064,7 @@
       </p:sp>
       <p:sp>
         <p:nvSpPr>
-          <p:cNvPr id="50" name="PlaceHolder 2"/>
+          <p:cNvPr id="94" name="PlaceHolder 2"/>
           <p:cNvSpPr>
             <a:spLocks noGrp="1"/>
           </p:cNvSpPr>
@@ -3826,8 +7074,8 @@
         </p:nvSpPr>
         <p:spPr>
           <a:xfrm>
-            <a:off x="504000" y="1326600"/>
-            <a:ext cx="9071640" cy="3288240"/>
+            <a:off x="504000" y="946080"/>
+            <a:ext cx="9071280" cy="3287880"/>
           </a:xfrm>
           <a:prstGeom prst="rect">
             <a:avLst/>
@@ -3843,6 +7091,9 @@
           </a:bodyPr>
           <a:p>
             <a:pPr marL="432000" indent="-324000">
+              <a:lnSpc>
+                <a:spcPct val="100000"/>
+              </a:lnSpc>
               <a:spcBef>
                 <a:spcPts val="1417"/>
               </a:spcBef>
@@ -3871,6 +7122,9 @@
           </a:p>
           <a:p>
             <a:pPr marL="432000" indent="-324000">
+              <a:lnSpc>
+                <a:spcPct val="100000"/>
+              </a:lnSpc>
               <a:spcBef>
                 <a:spcPts val="1417"/>
               </a:spcBef>
@@ -3888,7 +7142,7 @@
                 </a:solidFill>
                 <a:latin typeface="Arial"/>
               </a:rPr>
-              <a:t>В качестве улучшения проекта можно рассматривать добавление календаря и выбора билетов для более подробного планирования маршрута </a:t>
+              <a:t>В качестве улучшения проекта можно рассматривать добавление календаря и поиска билетов для более подробного планирования маршрута </a:t>
             </a:r>
             <a:endParaRPr b="0" lang="ru-RU" sz="2400" spc="-1" strike="noStrike">
               <a:solidFill>
@@ -3899,6 +7153,29 @@
           </a:p>
         </p:txBody>
       </p:sp>
+      <p:pic>
+        <p:nvPicPr>
+          <p:cNvPr id="95" name="" descr=""/>
+          <p:cNvPicPr/>
+          <p:nvPr/>
+        </p:nvPicPr>
+        <p:blipFill>
+          <a:blip r:embed="rId1"/>
+          <a:stretch/>
+        </p:blipFill>
+        <p:spPr>
+          <a:xfrm>
+            <a:off x="1275480" y="3061080"/>
+            <a:ext cx="7657920" cy="2609640"/>
+          </a:xfrm>
+          <a:prstGeom prst="rect">
+            <a:avLst/>
+          </a:prstGeom>
+          <a:ln w="0">
+            <a:noFill/>
+          </a:ln>
+        </p:spPr>
+      </p:pic>
     </p:spTree>
   </p:cSld>
   <mc:AlternateContent>
@@ -3917,10 +7194,236 @@
   <a:themeElements>
     <a:clrScheme name="Office">
       <a:dk1>
-        <a:sysClr val="windowText" lastClr="000000"/>
+        <a:srgbClr val="000000"/>
       </a:dk1>
       <a:lt1>
-        <a:sysClr val="window" lastClr="FFFFFF"/>
+        <a:srgbClr val="ffffff"/>
+      </a:lt1>
+      <a:dk2>
+        <a:srgbClr val="1f497d"/>
+      </a:dk2>
+      <a:lt2>
+        <a:srgbClr val="eeece1"/>
+      </a:lt2>
+      <a:accent1>
+        <a:srgbClr val="4f81bd"/>
+      </a:accent1>
+      <a:accent2>
+        <a:srgbClr val="c0504d"/>
+      </a:accent2>
+      <a:accent3>
+        <a:srgbClr val="9bbb59"/>
+      </a:accent3>
+      <a:accent4>
+        <a:srgbClr val="8064a2"/>
+      </a:accent4>
+      <a:accent5>
+        <a:srgbClr val="4bacc6"/>
+      </a:accent5>
+      <a:accent6>
+        <a:srgbClr val="f79646"/>
+      </a:accent6>
+      <a:hlink>
+        <a:srgbClr val="0000ff"/>
+      </a:hlink>
+      <a:folHlink>
+        <a:srgbClr val="800080"/>
+      </a:folHlink>
+    </a:clrScheme>
+    <a:fontScheme name="Office">
+      <a:majorFont>
+        <a:latin typeface="Arial"/>
+        <a:ea typeface="DejaVu Sans"/>
+        <a:cs typeface="DejaVu Sans"/>
+      </a:majorFont>
+      <a:minorFont>
+        <a:latin typeface="Arial"/>
+        <a:ea typeface="DejaVu Sans"/>
+        <a:cs typeface="DejaVu Sans"/>
+      </a:minorFont>
+    </a:fontScheme>
+    <a:fmtScheme name="Office">
+      <a:fillStyleLst>
+        <a:solidFill>
+          <a:schemeClr val="phClr"/>
+        </a:solidFill>
+        <a:gradFill rotWithShape="1">
+          <a:gsLst>
+            <a:gs pos="0">
+              <a:schemeClr val="phClr">
+                <a:tint val="50000"/>
+                <a:satMod val="300000"/>
+              </a:schemeClr>
+            </a:gs>
+            <a:gs pos="35000">
+              <a:schemeClr val="phClr">
+                <a:tint val="37000"/>
+                <a:satMod val="300000"/>
+              </a:schemeClr>
+            </a:gs>
+            <a:gs pos="100000">
+              <a:schemeClr val="phClr">
+                <a:tint val="15000"/>
+                <a:satMod val="350000"/>
+              </a:schemeClr>
+            </a:gs>
+          </a:gsLst>
+          <a:lin ang="16200000" scaled="1"/>
+        </a:gradFill>
+        <a:gradFill rotWithShape="1">
+          <a:gsLst>
+            <a:gs pos="0">
+              <a:schemeClr val="phClr">
+                <a:shade val="51000"/>
+                <a:satMod val="130000"/>
+              </a:schemeClr>
+            </a:gs>
+            <a:gs pos="80000">
+              <a:schemeClr val="phClr">
+                <a:shade val="93000"/>
+                <a:satMod val="130000"/>
+              </a:schemeClr>
+            </a:gs>
+            <a:gs pos="100000">
+              <a:schemeClr val="phClr">
+                <a:shade val="94000"/>
+                <a:satMod val="135000"/>
+              </a:schemeClr>
+            </a:gs>
+          </a:gsLst>
+          <a:lin ang="16200000" scaled="0"/>
+        </a:gradFill>
+      </a:fillStyleLst>
+      <a:lnStyleLst>
+        <a:ln w="9525" cap="flat" cmpd="sng" algn="ctr">
+          <a:solidFill>
+            <a:schemeClr val="phClr">
+              <a:shade val="95000"/>
+              <a:satMod val="105000"/>
+            </a:schemeClr>
+          </a:solidFill>
+          <a:prstDash val="solid"/>
+          <a:miter/>
+        </a:ln>
+        <a:ln w="25400" cap="flat" cmpd="sng" algn="ctr">
+          <a:solidFill>
+            <a:schemeClr val="phClr"/>
+          </a:solidFill>
+          <a:prstDash val="solid"/>
+          <a:miter/>
+        </a:ln>
+        <a:ln w="38100" cap="flat" cmpd="sng" algn="ctr">
+          <a:solidFill>
+            <a:schemeClr val="phClr"/>
+          </a:solidFill>
+          <a:prstDash val="solid"/>
+          <a:miter/>
+        </a:ln>
+      </a:lnStyleLst>
+      <a:effectStyleLst>
+        <a:effectStyle>
+          <a:effectLst>
+            <a:outerShdw blurRad="40000" dist="20000" dir="5400000" rotWithShape="0">
+              <a:srgbClr val="000000">
+                <a:alpha val="38000"/>
+              </a:srgbClr>
+            </a:outerShdw>
+          </a:effectLst>
+        </a:effectStyle>
+        <a:effectStyle>
+          <a:effectLst>
+            <a:outerShdw blurRad="40000" dist="23000" dir="5400000" rotWithShape="0">
+              <a:srgbClr val="000000">
+                <a:alpha val="35000"/>
+              </a:srgbClr>
+            </a:outerShdw>
+          </a:effectLst>
+        </a:effectStyle>
+        <a:effectStyle>
+          <a:effectLst>
+            <a:outerShdw blurRad="40000" dist="23000" dir="5400000" rotWithShape="0">
+              <a:srgbClr val="000000">
+                <a:alpha val="35000"/>
+              </a:srgbClr>
+            </a:outerShdw>
+          </a:effectLst>
+          <a:scene3d>
+            <a:camera prst="orthographicFront">
+              <a:rot lat="0" lon="0" rev="0"/>
+            </a:camera>
+            <a:lightRig rig="threePt" dir="t">
+              <a:rot lat="0" lon="0" rev="1200000"/>
+            </a:lightRig>
+          </a:scene3d>
+          <a:sp3d>
+            <a:bevelT w="63500" h="25400"/>
+          </a:sp3d>
+        </a:effectStyle>
+      </a:effectStyleLst>
+      <a:bgFillStyleLst>
+        <a:solidFill>
+          <a:schemeClr val="phClr"/>
+        </a:solidFill>
+        <a:gradFill rotWithShape="1">
+          <a:gsLst>
+            <a:gs pos="0">
+              <a:schemeClr val="phClr">
+                <a:tint val="40000"/>
+                <a:satMod val="350000"/>
+              </a:schemeClr>
+            </a:gs>
+            <a:gs pos="40000">
+              <a:schemeClr val="phClr">
+                <a:tint val="45000"/>
+                <a:shade val="99000"/>
+                <a:satMod val="350000"/>
+              </a:schemeClr>
+            </a:gs>
+            <a:gs pos="100000">
+              <a:schemeClr val="phClr">
+                <a:shade val="20000"/>
+                <a:satMod val="255000"/>
+              </a:schemeClr>
+            </a:gs>
+          </a:gsLst>
+          <a:path path="circle">
+            <a:fillToRect l="50000" t="-80000" r="50000" b="180000"/>
+          </a:path>
+        </a:gradFill>
+        <a:gradFill rotWithShape="1">
+          <a:gsLst>
+            <a:gs pos="0">
+              <a:schemeClr val="phClr">
+                <a:tint val="80000"/>
+                <a:satMod val="300000"/>
+              </a:schemeClr>
+            </a:gs>
+            <a:gs pos="100000">
+              <a:schemeClr val="phClr">
+                <a:shade val="30000"/>
+                <a:satMod val="200000"/>
+              </a:schemeClr>
+            </a:gs>
+          </a:gsLst>
+          <a:path path="circle">
+            <a:fillToRect l="50000" t="50000" r="50000" b="50000"/>
+          </a:path>
+        </a:gradFill>
+      </a:bgFillStyleLst>
+    </a:fmtScheme>
+  </a:themeElements>
+</a:theme>
+</file>
+
+<file path=ppt/theme/theme2.xml><?xml version="1.0" encoding="utf-8"?>
+<a:theme xmlns:a="http://schemas.openxmlformats.org/drawingml/2006/main" name="Office Theme">
+  <a:themeElements>
+    <a:clrScheme name="Office">
+      <a:dk1>
+        <a:srgbClr val="000000"/>
+      </a:dk1>
+      <a:lt1>
+        <a:srgbClr val="ffffff"/>
       </a:lt1>
       <a:dk2>
         <a:srgbClr val="1f497d"/>
